--- a/Presentation/AI 데이터센터 냉각 디지털 트윈 — 중간발표 (편집용).pptx
+++ b/Presentation/AI 데이터센터 냉각 디지털 트윈 — 중간발표 (편집용).pptx
@@ -12772,406 +12772,6 @@
       </p:sp>
       <p:sp>
         <p:nvSpPr>
-          <p:cNvPr id="9" name="TextBox 8"/>
-          <p:cNvSpPr txBox="1"/>
-          <p:nvPr/>
-        </p:nvSpPr>
-        <p:spPr>
-          <a:xfrm>
-            <a:off x="7688103" y="2909060"/>
-            <a:ext cx="1946357" cy="328064"/>
-          </a:xfrm>
-          <a:prstGeom prst="rect">
-            <a:avLst/>
-          </a:prstGeom>
-          <a:noFill/>
-        </p:spPr>
-        <p:txBody>
-          <a:bodyPr wrap="none" lIns="0" tIns="0" rIns="0" bIns="0">
-            <a:noAutofit/>
-          </a:bodyPr>
-          <a:lstStyle/>
-          <a:p>
-            <a:r>
-              <a:rPr lang="ko-KR" sz="1722" b="1">
-                <a:solidFill>
-                  <a:srgbClr val="D6E1EC"/>
-                </a:solidFill>
-                <a:latin typeface="Noto Sans KR"/>
-                <a:ea typeface="Noto Sans KR"/>
-              </a:rPr>
-              <a:t>실제</a:t>
-            </a:r>
-            <a:r>
-              <a:rPr lang="en-US" sz="1722" b="1">
-                <a:solidFill>
-                  <a:srgbClr val="D6E1EC"/>
-                </a:solidFill>
-                <a:latin typeface="Segoe UI"/>
-                <a:ea typeface="Segoe UI"/>
-              </a:rPr>
-              <a:t> </a:t>
-            </a:r>
-            <a:r>
-              <a:rPr lang="ko-KR" sz="1722" b="1">
-                <a:solidFill>
-                  <a:srgbClr val="D6E1EC"/>
-                </a:solidFill>
-                <a:latin typeface="Noto Sans KR"/>
-                <a:ea typeface="Noto Sans KR"/>
-              </a:rPr>
-              <a:t>화면</a:t>
-            </a:r>
-            <a:r>
-              <a:rPr lang="en-US" sz="1722" b="1">
-                <a:solidFill>
-                  <a:srgbClr val="D6E1EC"/>
-                </a:solidFill>
-                <a:latin typeface="Segoe UI"/>
-                <a:ea typeface="Segoe UI"/>
-              </a:rPr>
-              <a:t> </a:t>
-            </a:r>
-            <a:r>
-              <a:rPr lang="ko-KR" sz="1722" b="1">
-                <a:solidFill>
-                  <a:srgbClr val="D6E1EC"/>
-                </a:solidFill>
-                <a:latin typeface="Noto Sans KR"/>
-                <a:ea typeface="Noto Sans KR"/>
-              </a:rPr>
-              <a:t>삽입</a:t>
-            </a:r>
-            <a:r>
-              <a:rPr lang="en-US" sz="1722" b="1">
-                <a:solidFill>
-                  <a:srgbClr val="D6E1EC"/>
-                </a:solidFill>
-                <a:latin typeface="Segoe UI"/>
-                <a:ea typeface="Segoe UI"/>
-              </a:rPr>
-              <a:t> </a:t>
-            </a:r>
-            <a:r>
-              <a:rPr lang="ko-KR" sz="1722" b="1">
-                <a:solidFill>
-                  <a:srgbClr val="D6E1EC"/>
-                </a:solidFill>
-                <a:latin typeface="Noto Sans KR"/>
-                <a:ea typeface="Noto Sans KR"/>
-              </a:rPr>
-              <a:t>예정</a:t>
-            </a:r>
-          </a:p>
-        </p:txBody>
-      </p:sp>
-      <p:sp>
-        <p:nvSpPr>
-          <p:cNvPr id="10" name="TextBox 9"/>
-          <p:cNvSpPr txBox="1"/>
-          <p:nvPr/>
-        </p:nvSpPr>
-        <p:spPr>
-          <a:xfrm>
-            <a:off x="7485856" y="3326015"/>
-            <a:ext cx="2372300" cy="257558"/>
-          </a:xfrm>
-          <a:prstGeom prst="rect">
-            <a:avLst/>
-          </a:prstGeom>
-          <a:noFill/>
-        </p:spPr>
-        <p:txBody>
-          <a:bodyPr wrap="none" lIns="0" tIns="0" rIns="0" bIns="0">
-            <a:noAutofit/>
-          </a:bodyPr>
-          <a:lstStyle/>
-          <a:p>
-            <a:r>
-              <a:rPr lang="ko-KR" sz="1352" b="0">
-                <a:solidFill>
-                  <a:srgbClr val="A9B9CC"/>
-                </a:solidFill>
-                <a:latin typeface="Noto Sans KR"/>
-                <a:ea typeface="Noto Sans KR"/>
-              </a:rPr>
-              <a:t>배치</a:t>
-            </a:r>
-            <a:r>
-              <a:rPr lang="en-US" sz="1352" b="0">
-                <a:solidFill>
-                  <a:srgbClr val="A9B9CC"/>
-                </a:solidFill>
-                <a:latin typeface="Segoe UI"/>
-                <a:ea typeface="Segoe UI"/>
-              </a:rPr>
-              <a:t> </a:t>
-            </a:r>
-            <a:r>
-              <a:rPr lang="ko-KR" sz="1352" b="0">
-                <a:solidFill>
-                  <a:srgbClr val="A9B9CC"/>
-                </a:solidFill>
-                <a:latin typeface="Noto Sans KR"/>
-                <a:ea typeface="Noto Sans KR"/>
-              </a:rPr>
-              <a:t>모드</a:t>
-            </a:r>
-            <a:r>
-              <a:rPr lang="en-US" sz="1352" b="0">
-                <a:solidFill>
-                  <a:srgbClr val="A9B9CC"/>
-                </a:solidFill>
-                <a:latin typeface="Noto Sans KR"/>
-                <a:ea typeface="Noto Sans KR"/>
-              </a:rPr>
-              <a:t>: </a:t>
-            </a:r>
-            <a:r>
-              <a:rPr lang="ko-KR" sz="1352" b="0">
-                <a:solidFill>
-                  <a:srgbClr val="A9B9CC"/>
-                </a:solidFill>
-                <a:latin typeface="Noto Sans KR"/>
-                <a:ea typeface="Noto Sans KR"/>
-              </a:rPr>
-              <a:t>랙</a:t>
-            </a:r>
-            <a:r>
-              <a:rPr lang="en-US" sz="1352" b="0">
-                <a:solidFill>
-                  <a:srgbClr val="A9B9CC"/>
-                </a:solidFill>
-                <a:latin typeface="Segoe UI"/>
-                <a:ea typeface="Segoe UI"/>
-              </a:rPr>
-              <a:t> </a:t>
-            </a:r>
-            <a:r>
-              <a:rPr lang="ko-KR" sz="1352" b="0">
-                <a:solidFill>
-                  <a:srgbClr val="A9B9CC"/>
-                </a:solidFill>
-                <a:latin typeface="Noto Sans KR"/>
-                <a:ea typeface="Noto Sans KR"/>
-              </a:rPr>
-              <a:t>두</a:t>
-            </a:r>
-            <a:r>
-              <a:rPr lang="en-US" sz="1352" b="0">
-                <a:solidFill>
-                  <a:srgbClr val="A9B9CC"/>
-                </a:solidFill>
-                <a:latin typeface="Segoe UI"/>
-                <a:ea typeface="Segoe UI"/>
-              </a:rPr>
-              <a:t> </a:t>
-            </a:r>
-            <a:r>
-              <a:rPr lang="ko-KR" sz="1352" b="0">
-                <a:solidFill>
-                  <a:srgbClr val="A9B9CC"/>
-                </a:solidFill>
-                <a:latin typeface="Noto Sans KR"/>
-                <a:ea typeface="Noto Sans KR"/>
-              </a:rPr>
-              <a:t>대</a:t>
-            </a:r>
-            <a:r>
-              <a:rPr lang="en-US" sz="1352" b="0">
-                <a:solidFill>
-                  <a:srgbClr val="A9B9CC"/>
-                </a:solidFill>
-                <a:latin typeface="Segoe UI"/>
-                <a:ea typeface="Segoe UI"/>
-              </a:rPr>
-              <a:t> </a:t>
-            </a:r>
-            <a:r>
-              <a:rPr lang="ko-KR" sz="1352" b="0">
-                <a:solidFill>
-                  <a:srgbClr val="A9B9CC"/>
-                </a:solidFill>
-                <a:latin typeface="Noto Sans KR"/>
-                <a:ea typeface="Noto Sans KR"/>
-              </a:rPr>
-              <a:t>다중</a:t>
-            </a:r>
-            <a:r>
-              <a:rPr lang="en-US" sz="1352" b="0">
-                <a:solidFill>
-                  <a:srgbClr val="A9B9CC"/>
-                </a:solidFill>
-                <a:latin typeface="Segoe UI"/>
-                <a:ea typeface="Segoe UI"/>
-              </a:rPr>
-              <a:t> </a:t>
-            </a:r>
-            <a:r>
-              <a:rPr lang="ko-KR" sz="1352" b="0">
-                <a:solidFill>
-                  <a:srgbClr val="A9B9CC"/>
-                </a:solidFill>
-                <a:latin typeface="Noto Sans KR"/>
-                <a:ea typeface="Noto Sans KR"/>
-              </a:rPr>
-              <a:t>선택</a:t>
-            </a:r>
-            <a:r>
-              <a:rPr lang="en-US" sz="1352" b="0">
-                <a:solidFill>
-                  <a:srgbClr val="A9B9CC"/>
-                </a:solidFill>
-                <a:latin typeface="Noto Sans KR"/>
-                <a:ea typeface="Noto Sans KR"/>
-              </a:rPr>
-              <a:t> +</a:t>
-            </a:r>
-          </a:p>
-        </p:txBody>
-      </p:sp>
-      <p:sp>
-        <p:nvSpPr>
-          <p:cNvPr id="11" name="TextBox 10"/>
-          <p:cNvSpPr txBox="1"/>
-          <p:nvPr/>
-        </p:nvSpPr>
-        <p:spPr>
-          <a:xfrm>
-            <a:off x="7628255" y="3592549"/>
-            <a:ext cx="2095654" cy="259367"/>
-          </a:xfrm>
-          <a:prstGeom prst="rect">
-            <a:avLst/>
-          </a:prstGeom>
-          <a:noFill/>
-        </p:spPr>
-        <p:txBody>
-          <a:bodyPr wrap="none" lIns="0" tIns="0" rIns="0" bIns="0">
-            <a:noAutofit/>
-          </a:bodyPr>
-          <a:lstStyle/>
-          <a:p>
-            <a:r>
-              <a:rPr lang="en-US" sz="1361" b="0">
-                <a:solidFill>
-                  <a:srgbClr val="A9B9CC"/>
-                </a:solidFill>
-                <a:latin typeface="Noto Sans KR"/>
-                <a:ea typeface="Noto Sans KR"/>
-              </a:rPr>
-              <a:t>Ctrl+D </a:t>
-            </a:r>
-            <a:r>
-              <a:rPr lang="ko-KR" sz="1361" b="0">
-                <a:solidFill>
-                  <a:srgbClr val="A9B9CC"/>
-                </a:solidFill>
-                <a:latin typeface="Noto Sans KR"/>
-                <a:ea typeface="Noto Sans KR"/>
-              </a:rPr>
-              <a:t>복제</a:t>
-            </a:r>
-            <a:r>
-              <a:rPr lang="en-US" sz="1361" b="0">
-                <a:solidFill>
-                  <a:srgbClr val="A9B9CC"/>
-                </a:solidFill>
-                <a:latin typeface="Segoe UI"/>
-                <a:ea typeface="Segoe UI"/>
-              </a:rPr>
-              <a:t> </a:t>
-            </a:r>
-            <a:r>
-              <a:rPr lang="ko-KR" sz="1361" b="0">
-                <a:solidFill>
-                  <a:srgbClr val="A9B9CC"/>
-                </a:solidFill>
-                <a:latin typeface="Noto Sans KR"/>
-                <a:ea typeface="Noto Sans KR"/>
-              </a:rPr>
-              <a:t>목적지</a:t>
-            </a:r>
-            <a:r>
-              <a:rPr lang="en-US" sz="1361" b="0">
-                <a:solidFill>
-                  <a:srgbClr val="A9B9CC"/>
-                </a:solidFill>
-                <a:latin typeface="Segoe UI"/>
-                <a:ea typeface="Segoe UI"/>
-              </a:rPr>
-              <a:t> </a:t>
-            </a:r>
-            <a:r>
-              <a:rPr lang="ko-KR" sz="1361" b="0">
-                <a:solidFill>
-                  <a:srgbClr val="A9B9CC"/>
-                </a:solidFill>
-                <a:latin typeface="Noto Sans KR"/>
-                <a:ea typeface="Noto Sans KR"/>
-              </a:rPr>
-              <a:t>미리보</a:t>
-            </a:r>
-          </a:p>
-        </p:txBody>
-      </p:sp>
-      <p:sp>
-        <p:nvSpPr>
-          <p:cNvPr id="12" name="TextBox 11"/>
-          <p:cNvSpPr txBox="1"/>
-          <p:nvPr/>
-        </p:nvSpPr>
-        <p:spPr>
-          <a:xfrm>
-            <a:off x="8329930" y="3859714"/>
-            <a:ext cx="596651" cy="254298"/>
-          </a:xfrm>
-          <a:prstGeom prst="rect">
-            <a:avLst/>
-          </a:prstGeom>
-          <a:noFill/>
-        </p:spPr>
-        <p:txBody>
-          <a:bodyPr wrap="none" lIns="0" tIns="0" rIns="0" bIns="0">
-            <a:noAutofit/>
-          </a:bodyPr>
-          <a:lstStyle/>
-          <a:p>
-            <a:r>
-              <a:rPr lang="ko-KR" sz="1334" b="0">
-                <a:solidFill>
-                  <a:srgbClr val="A9B9CC"/>
-                </a:solidFill>
-                <a:latin typeface="Noto Sans KR"/>
-                <a:ea typeface="Noto Sans KR"/>
-              </a:rPr>
-              <a:t>기</a:t>
-            </a:r>
-            <a:r>
-              <a:rPr lang="en-US" sz="1334" b="0">
-                <a:solidFill>
-                  <a:srgbClr val="A9B9CC"/>
-                </a:solidFill>
-                <a:latin typeface="Segoe UI"/>
-                <a:ea typeface="Segoe UI"/>
-              </a:rPr>
-              <a:t> </a:t>
-            </a:r>
-            <a:r>
-              <a:rPr lang="ko-KR" sz="1334" b="0">
-                <a:solidFill>
-                  <a:srgbClr val="A9B9CC"/>
-                </a:solidFill>
-                <a:latin typeface="Noto Sans KR"/>
-                <a:ea typeface="Noto Sans KR"/>
-              </a:rPr>
-              <a:t>장면</a:t>
-            </a:r>
-          </a:p>
-        </p:txBody>
-      </p:sp>
-      <p:sp>
-        <p:nvSpPr>
           <p:cNvPr id="13" name="TextBox 12"/>
           <p:cNvSpPr txBox="1"/>
           <p:nvPr/>
@@ -13396,6 +12996,67 @@
                 <a:ea typeface="Noto Sans KR"/>
               </a:rPr>
               <a:t>복원</a:t>
+            </a:r>
+          </a:p>
+        </p:txBody>
+      </p:sp>
+      <p:pic>
+        <p:nvPicPr>
+          <p:cNvPr id="16" name="실제 화면" descr="p4.png"/>
+          <p:cNvPicPr>
+            <a:picLocks noChangeAspect="1"/>
+          </p:cNvPicPr>
+          <p:nvPr/>
+        </p:nvPicPr>
+        <p:blipFill>
+          <a:blip r:embed="rId3"/>
+          <a:stretch>
+            <a:fillRect/>
+          </a:stretch>
+        </p:blipFill>
+        <p:spPr>
+          <a:xfrm>
+            <a:off x="5797550" y="1917700"/>
+            <a:ext cx="5575300" cy="3130550"/>
+          </a:xfrm>
+          <a:prstGeom prst="roundRect">
+            <a:avLst>
+              <a:gd name="adj" fmla="val 2600"/>
+            </a:avLst>
+          </a:prstGeom>
+        </p:spPr>
+      </p:pic>
+      <p:sp>
+        <p:nvSpPr>
+          <p:cNvPr id="17" name="캡션"/>
+          <p:cNvSpPr txBox="1"/>
+          <p:nvPr/>
+        </p:nvSpPr>
+        <p:spPr>
+          <a:xfrm>
+            <a:off x="5797550" y="5124450"/>
+            <a:ext cx="5575300" cy="203200"/>
+          </a:xfrm>
+          <a:prstGeom prst="rect">
+            <a:avLst/>
+          </a:prstGeom>
+          <a:noFill/>
+        </p:spPr>
+        <p:txBody>
+          <a:bodyPr wrap="square" lIns="0" rIns="0" tIns="0" bIns="0">
+            <a:spAutoFit/>
+          </a:bodyPr>
+          <a:lstStyle/>
+          <a:p>
+            <a:r>
+              <a:rPr lang="ko-KR" sz="1100" b="0">
+                <a:solidFill>
+                  <a:srgbClr val="A9B9CC"/>
+                </a:solidFill>
+                <a:latin typeface="Noto Sans KR"/>
+                <a:ea typeface="Noto Sans KR"/>
+              </a:rPr>
+              <a:t>배치 모드 · 랙 2대 다중 선택(초록) → Ctrl+D 복제 미리보기(주황) · 2026. 10. 10 촬영</a:t>
             </a:r>
           </a:p>
         </p:txBody>
@@ -14361,466 +14022,6 @@
       </p:sp>
       <p:sp>
         <p:nvSpPr>
-          <p:cNvPr id="10" name="TextBox 9"/>
-          <p:cNvSpPr txBox="1"/>
-          <p:nvPr/>
-        </p:nvSpPr>
-        <p:spPr>
-          <a:xfrm>
-            <a:off x="7688103" y="2909060"/>
-            <a:ext cx="1946357" cy="328064"/>
-          </a:xfrm>
-          <a:prstGeom prst="rect">
-            <a:avLst/>
-          </a:prstGeom>
-          <a:noFill/>
-        </p:spPr>
-        <p:txBody>
-          <a:bodyPr wrap="none" lIns="0" tIns="0" rIns="0" bIns="0">
-            <a:noAutofit/>
-          </a:bodyPr>
-          <a:lstStyle/>
-          <a:p>
-            <a:r>
-              <a:rPr lang="ko-KR" sz="1722" b="1">
-                <a:solidFill>
-                  <a:srgbClr val="D6E1EC"/>
-                </a:solidFill>
-                <a:latin typeface="Noto Sans KR"/>
-                <a:ea typeface="Noto Sans KR"/>
-              </a:rPr>
-              <a:t>실제</a:t>
-            </a:r>
-            <a:r>
-              <a:rPr lang="en-US" sz="1722" b="1">
-                <a:solidFill>
-                  <a:srgbClr val="D6E1EC"/>
-                </a:solidFill>
-                <a:latin typeface="Segoe UI"/>
-                <a:ea typeface="Segoe UI"/>
-              </a:rPr>
-              <a:t> </a:t>
-            </a:r>
-            <a:r>
-              <a:rPr lang="ko-KR" sz="1722" b="1">
-                <a:solidFill>
-                  <a:srgbClr val="D6E1EC"/>
-                </a:solidFill>
-                <a:latin typeface="Noto Sans KR"/>
-                <a:ea typeface="Noto Sans KR"/>
-              </a:rPr>
-              <a:t>화면</a:t>
-            </a:r>
-            <a:r>
-              <a:rPr lang="en-US" sz="1722" b="1">
-                <a:solidFill>
-                  <a:srgbClr val="D6E1EC"/>
-                </a:solidFill>
-                <a:latin typeface="Segoe UI"/>
-                <a:ea typeface="Segoe UI"/>
-              </a:rPr>
-              <a:t> </a:t>
-            </a:r>
-            <a:r>
-              <a:rPr lang="ko-KR" sz="1722" b="1">
-                <a:solidFill>
-                  <a:srgbClr val="D6E1EC"/>
-                </a:solidFill>
-                <a:latin typeface="Noto Sans KR"/>
-                <a:ea typeface="Noto Sans KR"/>
-              </a:rPr>
-              <a:t>삽입</a:t>
-            </a:r>
-            <a:r>
-              <a:rPr lang="en-US" sz="1722" b="1">
-                <a:solidFill>
-                  <a:srgbClr val="D6E1EC"/>
-                </a:solidFill>
-                <a:latin typeface="Segoe UI"/>
-                <a:ea typeface="Segoe UI"/>
-              </a:rPr>
-              <a:t> </a:t>
-            </a:r>
-            <a:r>
-              <a:rPr lang="ko-KR" sz="1722" b="1">
-                <a:solidFill>
-                  <a:srgbClr val="D6E1EC"/>
-                </a:solidFill>
-                <a:latin typeface="Noto Sans KR"/>
-                <a:ea typeface="Noto Sans KR"/>
-              </a:rPr>
-              <a:t>예정</a:t>
-            </a:r>
-          </a:p>
-        </p:txBody>
-      </p:sp>
-      <p:sp>
-        <p:nvSpPr>
-          <p:cNvPr id="11" name="TextBox 10"/>
-          <p:cNvSpPr txBox="1"/>
-          <p:nvPr/>
-        </p:nvSpPr>
-        <p:spPr>
-          <a:xfrm>
-            <a:off x="7241381" y="3326049"/>
-            <a:ext cx="2904771" cy="257184"/>
-          </a:xfrm>
-          <a:prstGeom prst="rect">
-            <a:avLst/>
-          </a:prstGeom>
-          <a:noFill/>
-        </p:spPr>
-        <p:txBody>
-          <a:bodyPr wrap="none" lIns="0" tIns="0" rIns="0" bIns="0">
-            <a:noAutofit/>
-          </a:bodyPr>
-          <a:lstStyle/>
-          <a:p>
-            <a:r>
-              <a:rPr lang="ko-KR" sz="1350" b="0">
-                <a:solidFill>
-                  <a:srgbClr val="A9B9CC"/>
-                </a:solidFill>
-                <a:latin typeface="Noto Sans KR"/>
-                <a:ea typeface="Noto Sans KR"/>
-              </a:rPr>
-              <a:t>방</a:t>
-            </a:r>
-            <a:r>
-              <a:rPr lang="en-US" sz="1350" b="0">
-                <a:solidFill>
-                  <a:srgbClr val="A9B9CC"/>
-                </a:solidFill>
-                <a:latin typeface="Segoe UI"/>
-                <a:ea typeface="Segoe UI"/>
-              </a:rPr>
-              <a:t> </a:t>
-            </a:r>
-            <a:r>
-              <a:rPr lang="ko-KR" sz="1350" b="0">
-                <a:solidFill>
-                  <a:srgbClr val="A9B9CC"/>
-                </a:solidFill>
-                <a:latin typeface="Noto Sans KR"/>
-                <a:ea typeface="Noto Sans KR"/>
-              </a:rPr>
-              <a:t>범위</a:t>
-            </a:r>
-            <a:r>
-              <a:rPr lang="en-US" sz="1350" b="0">
-                <a:solidFill>
-                  <a:srgbClr val="A9B9CC"/>
-                </a:solidFill>
-                <a:latin typeface="Segoe UI"/>
-                <a:ea typeface="Segoe UI"/>
-              </a:rPr>
-              <a:t> </a:t>
-            </a:r>
-            <a:r>
-              <a:rPr lang="ko-KR" sz="1350" b="0">
-                <a:solidFill>
-                  <a:srgbClr val="A9B9CC"/>
-                </a:solidFill>
-                <a:latin typeface="Noto Sans KR"/>
-                <a:ea typeface="Noto Sans KR"/>
-              </a:rPr>
-              <a:t>편집</a:t>
-            </a:r>
-            <a:r>
-              <a:rPr lang="en-US" sz="1350" b="0">
-                <a:solidFill>
-                  <a:srgbClr val="A9B9CC"/>
-                </a:solidFill>
-                <a:latin typeface="Noto Sans KR"/>
-                <a:ea typeface="Noto Sans KR"/>
-              </a:rPr>
-              <a:t>: </a:t>
-            </a:r>
-            <a:r>
-              <a:rPr lang="ko-KR" sz="1350" b="0">
-                <a:solidFill>
-                  <a:srgbClr val="A9B9CC"/>
-                </a:solidFill>
-                <a:latin typeface="Noto Sans KR"/>
-                <a:ea typeface="Noto Sans KR"/>
-              </a:rPr>
-              <a:t>요청</a:t>
-            </a:r>
-            <a:r>
-              <a:rPr lang="en-US" sz="1350" b="0">
-                <a:solidFill>
-                  <a:srgbClr val="A9B9CC"/>
-                </a:solidFill>
-                <a:latin typeface="Segoe UI"/>
-                <a:ea typeface="Segoe UI"/>
-              </a:rPr>
-              <a:t> </a:t>
-            </a:r>
-            <a:r>
-              <a:rPr lang="ko-KR" sz="1350" b="0">
-                <a:solidFill>
-                  <a:srgbClr val="A9B9CC"/>
-                </a:solidFill>
-                <a:latin typeface="Noto Sans KR"/>
-                <a:ea typeface="Noto Sans KR"/>
-              </a:rPr>
-              <a:t>윤곽과</a:t>
-            </a:r>
-            <a:r>
-              <a:rPr lang="en-US" sz="1350" b="0">
-                <a:solidFill>
-                  <a:srgbClr val="A9B9CC"/>
-                </a:solidFill>
-                <a:latin typeface="Segoe UI"/>
-                <a:ea typeface="Segoe UI"/>
-              </a:rPr>
-              <a:t> </a:t>
-            </a:r>
-            <a:r>
-              <a:rPr lang="ko-KR" sz="1350" b="0">
-                <a:solidFill>
-                  <a:srgbClr val="A9B9CC"/>
-                </a:solidFill>
-                <a:latin typeface="Noto Sans KR"/>
-                <a:ea typeface="Noto Sans KR"/>
-              </a:rPr>
-              <a:t>계산</a:t>
-            </a:r>
-            <a:r>
-              <a:rPr lang="en-US" sz="1350" b="0">
-                <a:solidFill>
-                  <a:srgbClr val="A9B9CC"/>
-                </a:solidFill>
-                <a:latin typeface="Segoe UI"/>
-                <a:ea typeface="Segoe UI"/>
-              </a:rPr>
-              <a:t> </a:t>
-            </a:r>
-            <a:r>
-              <a:rPr lang="ko-KR" sz="1350" b="0">
-                <a:solidFill>
-                  <a:srgbClr val="A9B9CC"/>
-                </a:solidFill>
-                <a:latin typeface="Noto Sans KR"/>
-                <a:ea typeface="Noto Sans KR"/>
-              </a:rPr>
-              <a:t>상자가</a:t>
-            </a:r>
-          </a:p>
-        </p:txBody>
-      </p:sp>
-      <p:sp>
-        <p:nvSpPr>
-          <p:cNvPr id="12" name="TextBox 11"/>
-          <p:cNvSpPr txBox="1"/>
-          <p:nvPr/>
-        </p:nvSpPr>
-        <p:spPr>
-          <a:xfrm>
-            <a:off x="7338853" y="3593496"/>
-            <a:ext cx="2758107" cy="260894"/>
-          </a:xfrm>
-          <a:prstGeom prst="rect">
-            <a:avLst/>
-          </a:prstGeom>
-          <a:noFill/>
-        </p:spPr>
-        <p:txBody>
-          <a:bodyPr wrap="none" lIns="0" tIns="0" rIns="0" bIns="0">
-            <a:noAutofit/>
-          </a:bodyPr>
-          <a:lstStyle/>
-          <a:p>
-            <a:r>
-              <a:rPr lang="ko-KR" sz="1369" b="0">
-                <a:solidFill>
-                  <a:srgbClr val="A9B9CC"/>
-                </a:solidFill>
-                <a:latin typeface="Noto Sans KR"/>
-                <a:ea typeface="Noto Sans KR"/>
-              </a:rPr>
-              <a:t>함께</a:t>
-            </a:r>
-            <a:r>
-              <a:rPr lang="en-US" sz="1369" b="0">
-                <a:solidFill>
-                  <a:srgbClr val="A9B9CC"/>
-                </a:solidFill>
-                <a:latin typeface="Segoe UI"/>
-                <a:ea typeface="Segoe UI"/>
-              </a:rPr>
-              <a:t> </a:t>
-            </a:r>
-            <a:r>
-              <a:rPr lang="ko-KR" sz="1369" b="0">
-                <a:solidFill>
-                  <a:srgbClr val="A9B9CC"/>
-                </a:solidFill>
-                <a:latin typeface="Noto Sans KR"/>
-                <a:ea typeface="Noto Sans KR"/>
-              </a:rPr>
-              <a:t>보이는</a:t>
-            </a:r>
-            <a:r>
-              <a:rPr lang="en-US" sz="1369" b="0">
-                <a:solidFill>
-                  <a:srgbClr val="A9B9CC"/>
-                </a:solidFill>
-                <a:latin typeface="Segoe UI"/>
-                <a:ea typeface="Segoe UI"/>
-              </a:rPr>
-              <a:t> </a:t>
-            </a:r>
-            <a:r>
-              <a:rPr lang="ko-KR" sz="1369" b="0">
-                <a:solidFill>
-                  <a:srgbClr val="A9B9CC"/>
-                </a:solidFill>
-                <a:latin typeface="Noto Sans KR"/>
-                <a:ea typeface="Noto Sans KR"/>
-              </a:rPr>
-              <a:t>장면</a:t>
-            </a:r>
-            <a:r>
-              <a:rPr lang="en-US" sz="1369" b="0">
-                <a:solidFill>
-                  <a:srgbClr val="A9B9CC"/>
-                </a:solidFill>
-                <a:latin typeface="Noto Sans KR"/>
-                <a:ea typeface="Noto Sans KR"/>
-              </a:rPr>
-              <a:t> + </a:t>
-            </a:r>
-            <a:r>
-              <a:rPr lang="ko-KR" sz="1369" b="0">
-                <a:solidFill>
-                  <a:srgbClr val="A9B9CC"/>
-                </a:solidFill>
-                <a:latin typeface="Noto Sans KR"/>
-                <a:ea typeface="Noto Sans KR"/>
-              </a:rPr>
-              <a:t>천장</a:t>
-            </a:r>
-            <a:r>
-              <a:rPr lang="en-US" sz="1369" b="0">
-                <a:solidFill>
-                  <a:srgbClr val="A9B9CC"/>
-                </a:solidFill>
-                <a:latin typeface="Segoe UI"/>
-                <a:ea typeface="Segoe UI"/>
-              </a:rPr>
-              <a:t> </a:t>
-            </a:r>
-            <a:r>
-              <a:rPr lang="ko-KR" sz="1369" b="0">
-                <a:solidFill>
-                  <a:srgbClr val="A9B9CC"/>
-                </a:solidFill>
-                <a:latin typeface="Noto Sans KR"/>
-                <a:ea typeface="Noto Sans KR"/>
-              </a:rPr>
-              <a:t>판</a:t>
-            </a:r>
-            <a:r>
-              <a:rPr lang="en-US" sz="1369" b="0">
-                <a:solidFill>
-                  <a:srgbClr val="A9B9CC"/>
-                </a:solidFill>
-                <a:latin typeface="Segoe UI"/>
-                <a:ea typeface="Segoe UI"/>
-              </a:rPr>
-              <a:t>·</a:t>
-            </a:r>
-            <a:r>
-              <a:rPr lang="ko-KR" sz="1369" b="0">
-                <a:solidFill>
-                  <a:srgbClr val="A9B9CC"/>
-                </a:solidFill>
-                <a:latin typeface="Noto Sans KR"/>
-                <a:ea typeface="Noto Sans KR"/>
-              </a:rPr>
-              <a:t>구멍</a:t>
-            </a:r>
-            <a:r>
-              <a:rPr lang="en-US" sz="1369" b="0">
-                <a:solidFill>
-                  <a:srgbClr val="A9B9CC"/>
-                </a:solidFill>
-                <a:latin typeface="Segoe UI"/>
-                <a:ea typeface="Segoe UI"/>
-              </a:rPr>
-              <a:t> </a:t>
-            </a:r>
-            <a:r>
-              <a:rPr lang="ko-KR" sz="1369" b="0">
-                <a:solidFill>
-                  <a:srgbClr val="A9B9CC"/>
-                </a:solidFill>
-                <a:latin typeface="Noto Sans KR"/>
-                <a:ea typeface="Noto Sans KR"/>
-              </a:rPr>
-              <a:t>선</a:t>
-            </a:r>
-          </a:p>
-        </p:txBody>
-      </p:sp>
-      <p:sp>
-        <p:nvSpPr>
-          <p:cNvPr id="13" name="TextBox 12"/>
-          <p:cNvSpPr txBox="1"/>
-          <p:nvPr/>
-        </p:nvSpPr>
-        <p:spPr>
-          <a:xfrm>
-            <a:off x="8327231" y="3859708"/>
-            <a:ext cx="596794" cy="254364"/>
-          </a:xfrm>
-          <a:prstGeom prst="rect">
-            <a:avLst/>
-          </a:prstGeom>
-          <a:noFill/>
-        </p:spPr>
-        <p:txBody>
-          <a:bodyPr wrap="none" lIns="0" tIns="0" rIns="0" bIns="0">
-            <a:noAutofit/>
-          </a:bodyPr>
-          <a:lstStyle/>
-          <a:p>
-            <a:r>
-              <a:rPr lang="ko-KR" sz="1335" b="0">
-                <a:solidFill>
-                  <a:srgbClr val="A9B9CC"/>
-                </a:solidFill>
-                <a:latin typeface="Noto Sans KR"/>
-                <a:ea typeface="Noto Sans KR"/>
-              </a:rPr>
-              <a:t>택</a:t>
-            </a:r>
-            <a:r>
-              <a:rPr lang="en-US" sz="1335" b="0">
-                <a:solidFill>
-                  <a:srgbClr val="A9B9CC"/>
-                </a:solidFill>
-                <a:latin typeface="Segoe UI"/>
-                <a:ea typeface="Segoe UI"/>
-              </a:rPr>
-              <a:t> </a:t>
-            </a:r>
-            <a:r>
-              <a:rPr lang="ko-KR" sz="1335" b="0">
-                <a:solidFill>
-                  <a:srgbClr val="A9B9CC"/>
-                </a:solidFill>
-                <a:latin typeface="Noto Sans KR"/>
-                <a:ea typeface="Noto Sans KR"/>
-              </a:rPr>
-              <a:t>상태</a:t>
-            </a:r>
-          </a:p>
-        </p:txBody>
-      </p:sp>
-      <p:sp>
-        <p:nvSpPr>
           <p:cNvPr id="14" name="TextBox 13"/>
           <p:cNvSpPr txBox="1"/>
           <p:nvPr/>
@@ -15035,6 +14236,67 @@
                 <a:ea typeface="Noto Sans KR"/>
               </a:rPr>
               <a:t> → Undo</a:t>
+            </a:r>
+          </a:p>
+        </p:txBody>
+      </p:sp>
+      <p:pic>
+        <p:nvPicPr>
+          <p:cNvPr id="17" name="실제 화면" descr="p5.png"/>
+          <p:cNvPicPr>
+            <a:picLocks noChangeAspect="1"/>
+          </p:cNvPicPr>
+          <p:nvPr/>
+        </p:nvPicPr>
+        <p:blipFill>
+          <a:blip r:embed="rId3"/>
+          <a:stretch>
+            <a:fillRect/>
+          </a:stretch>
+        </p:blipFill>
+        <p:spPr>
+          <a:xfrm>
+            <a:off x="5797550" y="1917700"/>
+            <a:ext cx="5575300" cy="3130550"/>
+          </a:xfrm>
+          <a:prstGeom prst="roundRect">
+            <a:avLst>
+              <a:gd name="adj" fmla="val 2600"/>
+            </a:avLst>
+          </a:prstGeom>
+        </p:spPr>
+      </p:pic>
+      <p:sp>
+        <p:nvSpPr>
+          <p:cNvPr id="18" name="캡션"/>
+          <p:cNvSpPr txBox="1"/>
+          <p:nvPr/>
+        </p:nvSpPr>
+        <p:spPr>
+          <a:xfrm>
+            <a:off x="5797550" y="5124450"/>
+            <a:ext cx="5575300" cy="203200"/>
+          </a:xfrm>
+          <a:prstGeom prst="rect">
+            <a:avLst/>
+          </a:prstGeom>
+          <a:noFill/>
+        </p:spPr>
+        <p:txBody>
+          <a:bodyPr wrap="square" lIns="0" rIns="0" tIns="0" bIns="0">
+            <a:spAutoFit/>
+          </a:bodyPr>
+          <a:lstStyle/>
+          <a:p>
+            <a:r>
+              <a:rPr lang="ko-KR" sz="1100" b="0">
+                <a:solidFill>
+                  <a:srgbClr val="A9B9CC"/>
+                </a:solidFill>
+                <a:latin typeface="Noto Sans KR"/>
+                <a:ea typeface="Noto Sans KR"/>
+              </a:rPr>
+              <a:t>천장 판(초록)과 구멍 1번 선택 · 작은 화면: 방 범위 편집 미리보기(주황 윤곽) · 2026. 10. 10 촬영</a:t>
             </a:r>
           </a:p>
         </p:txBody>
@@ -15980,406 +15242,6 @@
       </p:sp>
       <p:sp>
         <p:nvSpPr>
-          <p:cNvPr id="10" name="TextBox 9"/>
-          <p:cNvSpPr txBox="1"/>
-          <p:nvPr/>
-        </p:nvSpPr>
-        <p:spPr>
-          <a:xfrm>
-            <a:off x="7688103" y="2909060"/>
-            <a:ext cx="1946357" cy="328064"/>
-          </a:xfrm>
-          <a:prstGeom prst="rect">
-            <a:avLst/>
-          </a:prstGeom>
-          <a:noFill/>
-        </p:spPr>
-        <p:txBody>
-          <a:bodyPr wrap="none" lIns="0" tIns="0" rIns="0" bIns="0">
-            <a:noAutofit/>
-          </a:bodyPr>
-          <a:lstStyle/>
-          <a:p>
-            <a:r>
-              <a:rPr lang="ko-KR" sz="1722" b="1">
-                <a:solidFill>
-                  <a:srgbClr val="D6E1EC"/>
-                </a:solidFill>
-                <a:latin typeface="Noto Sans KR"/>
-                <a:ea typeface="Noto Sans KR"/>
-              </a:rPr>
-              <a:t>실제</a:t>
-            </a:r>
-            <a:r>
-              <a:rPr lang="en-US" sz="1722" b="1">
-                <a:solidFill>
-                  <a:srgbClr val="D6E1EC"/>
-                </a:solidFill>
-                <a:latin typeface="Segoe UI"/>
-                <a:ea typeface="Segoe UI"/>
-              </a:rPr>
-              <a:t> </a:t>
-            </a:r>
-            <a:r>
-              <a:rPr lang="ko-KR" sz="1722" b="1">
-                <a:solidFill>
-                  <a:srgbClr val="D6E1EC"/>
-                </a:solidFill>
-                <a:latin typeface="Noto Sans KR"/>
-                <a:ea typeface="Noto Sans KR"/>
-              </a:rPr>
-              <a:t>화면</a:t>
-            </a:r>
-            <a:r>
-              <a:rPr lang="en-US" sz="1722" b="1">
-                <a:solidFill>
-                  <a:srgbClr val="D6E1EC"/>
-                </a:solidFill>
-                <a:latin typeface="Segoe UI"/>
-                <a:ea typeface="Segoe UI"/>
-              </a:rPr>
-              <a:t> </a:t>
-            </a:r>
-            <a:r>
-              <a:rPr lang="ko-KR" sz="1722" b="1">
-                <a:solidFill>
-                  <a:srgbClr val="D6E1EC"/>
-                </a:solidFill>
-                <a:latin typeface="Noto Sans KR"/>
-                <a:ea typeface="Noto Sans KR"/>
-              </a:rPr>
-              <a:t>삽입</a:t>
-            </a:r>
-            <a:r>
-              <a:rPr lang="en-US" sz="1722" b="1">
-                <a:solidFill>
-                  <a:srgbClr val="D6E1EC"/>
-                </a:solidFill>
-                <a:latin typeface="Segoe UI"/>
-                <a:ea typeface="Segoe UI"/>
-              </a:rPr>
-              <a:t> </a:t>
-            </a:r>
-            <a:r>
-              <a:rPr lang="ko-KR" sz="1722" b="1">
-                <a:solidFill>
-                  <a:srgbClr val="D6E1EC"/>
-                </a:solidFill>
-                <a:latin typeface="Noto Sans KR"/>
-                <a:ea typeface="Noto Sans KR"/>
-              </a:rPr>
-              <a:t>예정</a:t>
-            </a:r>
-          </a:p>
-        </p:txBody>
-      </p:sp>
-      <p:sp>
-        <p:nvSpPr>
-          <p:cNvPr id="11" name="TextBox 10"/>
-          <p:cNvSpPr txBox="1"/>
-          <p:nvPr/>
-        </p:nvSpPr>
-        <p:spPr>
-          <a:xfrm>
-            <a:off x="7522527" y="3326049"/>
-            <a:ext cx="2311075" cy="257185"/>
-          </a:xfrm>
-          <a:prstGeom prst="rect">
-            <a:avLst/>
-          </a:prstGeom>
-          <a:noFill/>
-        </p:spPr>
-        <p:txBody>
-          <a:bodyPr wrap="none" lIns="0" tIns="0" rIns="0" bIns="0">
-            <a:noAutofit/>
-          </a:bodyPr>
-          <a:lstStyle/>
-          <a:p>
-            <a:r>
-              <a:rPr lang="ko-KR" sz="1350" b="0">
-                <a:solidFill>
-                  <a:srgbClr val="A9B9CC"/>
-                </a:solidFill>
-                <a:latin typeface="Noto Sans KR"/>
-                <a:ea typeface="Noto Sans KR"/>
-              </a:rPr>
-              <a:t>패치</a:t>
-            </a:r>
-            <a:r>
-              <a:rPr lang="en-US" sz="1350" b="0">
-                <a:solidFill>
-                  <a:srgbClr val="A9B9CC"/>
-                </a:solidFill>
-                <a:latin typeface="Segoe UI"/>
-                <a:ea typeface="Segoe UI"/>
-              </a:rPr>
-              <a:t> </a:t>
-            </a:r>
-            <a:r>
-              <a:rPr lang="ko-KR" sz="1350" b="0">
-                <a:solidFill>
-                  <a:srgbClr val="A9B9CC"/>
-                </a:solidFill>
-                <a:latin typeface="Noto Sans KR"/>
-                <a:ea typeface="Noto Sans KR"/>
-              </a:rPr>
-              <a:t>맵</a:t>
-            </a:r>
-            <a:r>
-              <a:rPr lang="en-US" sz="1350" b="0">
-                <a:solidFill>
-                  <a:srgbClr val="A9B9CC"/>
-                </a:solidFill>
-                <a:latin typeface="Noto Sans KR"/>
-                <a:ea typeface="Noto Sans KR"/>
-              </a:rPr>
-              <a:t>: </a:t>
-            </a:r>
-            <a:r>
-              <a:rPr lang="ko-KR" sz="1350" b="0">
-                <a:solidFill>
-                  <a:srgbClr val="A9B9CC"/>
-                </a:solidFill>
-                <a:latin typeface="Noto Sans KR"/>
-                <a:ea typeface="Noto Sans KR"/>
-              </a:rPr>
-              <a:t>케이블</a:t>
-            </a:r>
-            <a:r>
-              <a:rPr lang="en-US" sz="1350" b="0">
-                <a:solidFill>
-                  <a:srgbClr val="A9B9CC"/>
-                </a:solidFill>
-                <a:latin typeface="Segoe UI"/>
-                <a:ea typeface="Segoe UI"/>
-              </a:rPr>
-              <a:t> </a:t>
-            </a:r>
-            <a:r>
-              <a:rPr lang="ko-KR" sz="1350" b="0">
-                <a:solidFill>
-                  <a:srgbClr val="A9B9CC"/>
-                </a:solidFill>
-                <a:latin typeface="Noto Sans KR"/>
-                <a:ea typeface="Noto Sans KR"/>
-              </a:rPr>
-              <a:t>하나를</a:t>
-            </a:r>
-            <a:r>
-              <a:rPr lang="en-US" sz="1350" b="0">
-                <a:solidFill>
-                  <a:srgbClr val="A9B9CC"/>
-                </a:solidFill>
-                <a:latin typeface="Segoe UI"/>
-                <a:ea typeface="Segoe UI"/>
-              </a:rPr>
-              <a:t> </a:t>
-            </a:r>
-            <a:r>
-              <a:rPr lang="ko-KR" sz="1350" b="0">
-                <a:solidFill>
-                  <a:srgbClr val="A9B9CC"/>
-                </a:solidFill>
-                <a:latin typeface="Noto Sans KR"/>
-                <a:ea typeface="Noto Sans KR"/>
-              </a:rPr>
-              <a:t>선택해</a:t>
-            </a:r>
-          </a:p>
-        </p:txBody>
-      </p:sp>
-      <p:sp>
-        <p:nvSpPr>
-          <p:cNvPr id="12" name="TextBox 11"/>
-          <p:cNvSpPr txBox="1"/>
-          <p:nvPr/>
-        </p:nvSpPr>
-        <p:spPr>
-          <a:xfrm>
-            <a:off x="7434580" y="3593506"/>
-            <a:ext cx="2631350" cy="260780"/>
-          </a:xfrm>
-          <a:prstGeom prst="rect">
-            <a:avLst/>
-          </a:prstGeom>
-          <a:noFill/>
-        </p:spPr>
-        <p:txBody>
-          <a:bodyPr wrap="none" lIns="0" tIns="0" rIns="0" bIns="0">
-            <a:noAutofit/>
-          </a:bodyPr>
-          <a:lstStyle/>
-          <a:p>
-            <a:r>
-              <a:rPr lang="ko-KR" sz="1368" b="0">
-                <a:solidFill>
-                  <a:srgbClr val="A9B9CC"/>
-                </a:solidFill>
-                <a:latin typeface="Noto Sans KR"/>
-                <a:ea typeface="Noto Sans KR"/>
-              </a:rPr>
-              <a:t>연결</a:t>
-            </a:r>
-            <a:r>
-              <a:rPr lang="en-US" sz="1368" b="0">
-                <a:solidFill>
-                  <a:srgbClr val="A9B9CC"/>
-                </a:solidFill>
-                <a:latin typeface="Segoe UI"/>
-                <a:ea typeface="Segoe UI"/>
-              </a:rPr>
-              <a:t> </a:t>
-            </a:r>
-            <a:r>
-              <a:rPr lang="ko-KR" sz="1368" b="0">
-                <a:solidFill>
-                  <a:srgbClr val="A9B9CC"/>
-                </a:solidFill>
-                <a:latin typeface="Noto Sans KR"/>
-                <a:ea typeface="Noto Sans KR"/>
-              </a:rPr>
-              <a:t>장비</a:t>
-            </a:r>
-            <a:r>
-              <a:rPr lang="en-US" sz="1368" b="0">
-                <a:solidFill>
-                  <a:srgbClr val="A9B9CC"/>
-                </a:solidFill>
-                <a:latin typeface="Segoe UI"/>
-                <a:ea typeface="Segoe UI"/>
-              </a:rPr>
-              <a:t>·</a:t>
-            </a:r>
-            <a:r>
-              <a:rPr lang="ko-KR" sz="1368" b="0">
-                <a:solidFill>
-                  <a:srgbClr val="A9B9CC"/>
-                </a:solidFill>
-                <a:latin typeface="Noto Sans KR"/>
-                <a:ea typeface="Noto Sans KR"/>
-              </a:rPr>
-              <a:t>포트</a:t>
-            </a:r>
-            <a:r>
-              <a:rPr lang="en-US" sz="1368" b="0">
-                <a:solidFill>
-                  <a:srgbClr val="A9B9CC"/>
-                </a:solidFill>
-                <a:latin typeface="Segoe UI"/>
-                <a:ea typeface="Segoe UI"/>
-              </a:rPr>
-              <a:t>·</a:t>
-            </a:r>
-            <a:r>
-              <a:rPr lang="ko-KR" sz="1368" b="0">
-                <a:solidFill>
-                  <a:srgbClr val="A9B9CC"/>
-                </a:solidFill>
-                <a:latin typeface="Noto Sans KR"/>
-                <a:ea typeface="Noto Sans KR"/>
-              </a:rPr>
-              <a:t>계획</a:t>
-            </a:r>
-            <a:r>
-              <a:rPr lang="en-US" sz="1368" b="0">
-                <a:solidFill>
-                  <a:srgbClr val="A9B9CC"/>
-                </a:solidFill>
-                <a:latin typeface="Segoe UI"/>
-                <a:ea typeface="Segoe UI"/>
-              </a:rPr>
-              <a:t> </a:t>
-            </a:r>
-            <a:r>
-              <a:rPr lang="ko-KR" sz="1368" b="0">
-                <a:solidFill>
-                  <a:srgbClr val="A9B9CC"/>
-                </a:solidFill>
-                <a:latin typeface="Noto Sans KR"/>
-                <a:ea typeface="Noto Sans KR"/>
-              </a:rPr>
-              <a:t>길이가</a:t>
-            </a:r>
-            <a:r>
-              <a:rPr lang="en-US" sz="1368" b="0">
-                <a:solidFill>
-                  <a:srgbClr val="A9B9CC"/>
-                </a:solidFill>
-                <a:latin typeface="Segoe UI"/>
-                <a:ea typeface="Segoe UI"/>
-              </a:rPr>
-              <a:t> </a:t>
-            </a:r>
-            <a:r>
-              <a:rPr lang="ko-KR" sz="1368" b="0">
-                <a:solidFill>
-                  <a:srgbClr val="A9B9CC"/>
-                </a:solidFill>
-                <a:latin typeface="Noto Sans KR"/>
-                <a:ea typeface="Noto Sans KR"/>
-              </a:rPr>
-              <a:t>보이</a:t>
-            </a:r>
-          </a:p>
-        </p:txBody>
-      </p:sp>
-      <p:sp>
-        <p:nvSpPr>
-          <p:cNvPr id="13" name="TextBox 12"/>
-          <p:cNvSpPr txBox="1"/>
-          <p:nvPr/>
-        </p:nvSpPr>
-        <p:spPr>
-          <a:xfrm>
-            <a:off x="8323103" y="3859420"/>
-            <a:ext cx="603525" cy="257500"/>
-          </a:xfrm>
-          <a:prstGeom prst="rect">
-            <a:avLst/>
-          </a:prstGeom>
-          <a:noFill/>
-        </p:spPr>
-        <p:txBody>
-          <a:bodyPr wrap="none" lIns="0" tIns="0" rIns="0" bIns="0">
-            <a:noAutofit/>
-          </a:bodyPr>
-          <a:lstStyle/>
-          <a:p>
-            <a:r>
-              <a:rPr lang="ko-KR" sz="1351" b="0">
-                <a:solidFill>
-                  <a:srgbClr val="A9B9CC"/>
-                </a:solidFill>
-                <a:latin typeface="Noto Sans KR"/>
-                <a:ea typeface="Noto Sans KR"/>
-              </a:rPr>
-              <a:t>는</a:t>
-            </a:r>
-            <a:r>
-              <a:rPr lang="en-US" sz="1351" b="0">
-                <a:solidFill>
-                  <a:srgbClr val="A9B9CC"/>
-                </a:solidFill>
-                <a:latin typeface="Segoe UI"/>
-                <a:ea typeface="Segoe UI"/>
-              </a:rPr>
-              <a:t> </a:t>
-            </a:r>
-            <a:r>
-              <a:rPr lang="ko-KR" sz="1351" b="0">
-                <a:solidFill>
-                  <a:srgbClr val="A9B9CC"/>
-                </a:solidFill>
-                <a:latin typeface="Noto Sans KR"/>
-                <a:ea typeface="Noto Sans KR"/>
-              </a:rPr>
-              <a:t>장면</a:t>
-            </a:r>
-          </a:p>
-        </p:txBody>
-      </p:sp>
-      <p:sp>
-        <p:nvSpPr>
           <p:cNvPr id="14" name="TextBox 13"/>
           <p:cNvSpPr txBox="1"/>
           <p:nvPr/>
@@ -16644,6 +15506,67 @@
                 <a:ea typeface="Noto Sans KR"/>
               </a:rPr>
               <a:t>닫기</a:t>
+            </a:r>
+          </a:p>
+        </p:txBody>
+      </p:sp>
+      <p:pic>
+        <p:nvPicPr>
+          <p:cNvPr id="17" name="실제 화면" descr="p6.png"/>
+          <p:cNvPicPr>
+            <a:picLocks noChangeAspect="1"/>
+          </p:cNvPicPr>
+          <p:nvPr/>
+        </p:nvPicPr>
+        <p:blipFill>
+          <a:blip r:embed="rId3"/>
+          <a:stretch>
+            <a:fillRect/>
+          </a:stretch>
+        </p:blipFill>
+        <p:spPr>
+          <a:xfrm>
+            <a:off x="5797550" y="1917700"/>
+            <a:ext cx="5575300" cy="3130550"/>
+          </a:xfrm>
+          <a:prstGeom prst="roundRect">
+            <a:avLst>
+              <a:gd name="adj" fmla="val 2600"/>
+            </a:avLst>
+          </a:prstGeom>
+        </p:spPr>
+      </p:pic>
+      <p:sp>
+        <p:nvSpPr>
+          <p:cNvPr id="18" name="캡션"/>
+          <p:cNvSpPr txBox="1"/>
+          <p:nvPr/>
+        </p:nvSpPr>
+        <p:spPr>
+          <a:xfrm>
+            <a:off x="5797550" y="5124450"/>
+            <a:ext cx="5575300" cy="203200"/>
+          </a:xfrm>
+          <a:prstGeom prst="rect">
+            <a:avLst/>
+          </a:prstGeom>
+          <a:noFill/>
+        </p:spPr>
+        <p:txBody>
+          <a:bodyPr wrap="square" lIns="0" rIns="0" tIns="0" bIns="0">
+            <a:spAutoFit/>
+          </a:bodyPr>
+          <a:lstStyle/>
+          <a:p>
+            <a:r>
+              <a:rPr lang="ko-KR" sz="1100" b="0">
+                <a:solidFill>
+                  <a:srgbClr val="A9B9CC"/>
+                </a:solidFill>
+                <a:latin typeface="Noto Sans KR"/>
+                <a:ea typeface="Noto Sans KR"/>
+              </a:rPr>
+              <a:t>패치 맵 · 케이블 1번 선택(노랑): 랙 포트 8 → 스파인 포트 1, 계획 길이 8.7 m · 2026. 10. 10 촬영</a:t>
             </a:r>
           </a:p>
         </p:txBody>
@@ -19228,446 +18151,6 @@
       </p:sp>
       <p:sp>
         <p:nvSpPr>
-          <p:cNvPr id="9" name="TextBox 8"/>
-          <p:cNvSpPr txBox="1"/>
-          <p:nvPr/>
-        </p:nvSpPr>
-        <p:spPr>
-          <a:xfrm>
-            <a:off x="7688103" y="2909060"/>
-            <a:ext cx="1946357" cy="328064"/>
-          </a:xfrm>
-          <a:prstGeom prst="rect">
-            <a:avLst/>
-          </a:prstGeom>
-          <a:noFill/>
-        </p:spPr>
-        <p:txBody>
-          <a:bodyPr wrap="none" lIns="0" tIns="0" rIns="0" bIns="0">
-            <a:noAutofit/>
-          </a:bodyPr>
-          <a:lstStyle/>
-          <a:p>
-            <a:r>
-              <a:rPr lang="ko-KR" sz="1722" b="1">
-                <a:solidFill>
-                  <a:srgbClr val="D6E1EC"/>
-                </a:solidFill>
-                <a:latin typeface="Noto Sans KR"/>
-                <a:ea typeface="Noto Sans KR"/>
-              </a:rPr>
-              <a:t>실제</a:t>
-            </a:r>
-            <a:r>
-              <a:rPr lang="en-US" sz="1722" b="1">
-                <a:solidFill>
-                  <a:srgbClr val="D6E1EC"/>
-                </a:solidFill>
-                <a:latin typeface="Segoe UI"/>
-                <a:ea typeface="Segoe UI"/>
-              </a:rPr>
-              <a:t> </a:t>
-            </a:r>
-            <a:r>
-              <a:rPr lang="ko-KR" sz="1722" b="1">
-                <a:solidFill>
-                  <a:srgbClr val="D6E1EC"/>
-                </a:solidFill>
-                <a:latin typeface="Noto Sans KR"/>
-                <a:ea typeface="Noto Sans KR"/>
-              </a:rPr>
-              <a:t>화면</a:t>
-            </a:r>
-            <a:r>
-              <a:rPr lang="en-US" sz="1722" b="1">
-                <a:solidFill>
-                  <a:srgbClr val="D6E1EC"/>
-                </a:solidFill>
-                <a:latin typeface="Segoe UI"/>
-                <a:ea typeface="Segoe UI"/>
-              </a:rPr>
-              <a:t> </a:t>
-            </a:r>
-            <a:r>
-              <a:rPr lang="ko-KR" sz="1722" b="1">
-                <a:solidFill>
-                  <a:srgbClr val="D6E1EC"/>
-                </a:solidFill>
-                <a:latin typeface="Noto Sans KR"/>
-                <a:ea typeface="Noto Sans KR"/>
-              </a:rPr>
-              <a:t>삽입</a:t>
-            </a:r>
-            <a:r>
-              <a:rPr lang="en-US" sz="1722" b="1">
-                <a:solidFill>
-                  <a:srgbClr val="D6E1EC"/>
-                </a:solidFill>
-                <a:latin typeface="Segoe UI"/>
-                <a:ea typeface="Segoe UI"/>
-              </a:rPr>
-              <a:t> </a:t>
-            </a:r>
-            <a:r>
-              <a:rPr lang="ko-KR" sz="1722" b="1">
-                <a:solidFill>
-                  <a:srgbClr val="D6E1EC"/>
-                </a:solidFill>
-                <a:latin typeface="Noto Sans KR"/>
-                <a:ea typeface="Noto Sans KR"/>
-              </a:rPr>
-              <a:t>예정</a:t>
-            </a:r>
-          </a:p>
-        </p:txBody>
-      </p:sp>
-      <p:sp>
-        <p:nvSpPr>
-          <p:cNvPr id="10" name="TextBox 9"/>
-          <p:cNvSpPr txBox="1"/>
-          <p:nvPr/>
-        </p:nvSpPr>
-        <p:spPr>
-          <a:xfrm>
-            <a:off x="7371080" y="3325861"/>
-            <a:ext cx="2635892" cy="259235"/>
-          </a:xfrm>
-          <a:prstGeom prst="rect">
-            <a:avLst/>
-          </a:prstGeom>
-          <a:noFill/>
-        </p:spPr>
-        <p:txBody>
-          <a:bodyPr wrap="none" lIns="0" tIns="0" rIns="0" bIns="0">
-            <a:noAutofit/>
-          </a:bodyPr>
-          <a:lstStyle/>
-          <a:p>
-            <a:r>
-              <a:rPr lang="ko-KR" sz="1360" b="0">
-                <a:solidFill>
-                  <a:srgbClr val="A9B9CC"/>
-                </a:solidFill>
-                <a:latin typeface="Noto Sans KR"/>
-                <a:ea typeface="Noto Sans KR"/>
-              </a:rPr>
-              <a:t>예열된</a:t>
-            </a:r>
-            <a:r>
-              <a:rPr lang="en-US" sz="1360" b="0">
-                <a:solidFill>
-                  <a:srgbClr val="A9B9CC"/>
-                </a:solidFill>
-                <a:latin typeface="Segoe UI"/>
-                <a:ea typeface="Segoe UI"/>
-              </a:rPr>
-              <a:t> </a:t>
-            </a:r>
-            <a:r>
-              <a:rPr lang="ko-KR" sz="1360" b="0">
-                <a:solidFill>
-                  <a:srgbClr val="A9B9CC"/>
-                </a:solidFill>
-                <a:latin typeface="Noto Sans KR"/>
-                <a:ea typeface="Noto Sans KR"/>
-              </a:rPr>
-              <a:t>온도</a:t>
-            </a:r>
-            <a:r>
-              <a:rPr lang="en-US" sz="1360" b="0">
-                <a:solidFill>
-                  <a:srgbClr val="A9B9CC"/>
-                </a:solidFill>
-                <a:latin typeface="Segoe UI"/>
-                <a:ea typeface="Segoe UI"/>
-              </a:rPr>
-              <a:t> </a:t>
-            </a:r>
-            <a:r>
-              <a:rPr lang="ko-KR" sz="1360" b="0">
-                <a:solidFill>
-                  <a:srgbClr val="A9B9CC"/>
-                </a:solidFill>
-                <a:latin typeface="Noto Sans KR"/>
-                <a:ea typeface="Noto Sans KR"/>
-              </a:rPr>
-              <a:t>볼륨</a:t>
-            </a:r>
-            <a:r>
-              <a:rPr lang="en-US" sz="1360" b="0">
-                <a:solidFill>
-                  <a:srgbClr val="A9B9CC"/>
-                </a:solidFill>
-                <a:latin typeface="Noto Sans KR"/>
-                <a:ea typeface="Noto Sans KR"/>
-              </a:rPr>
-              <a:t> + </a:t>
-            </a:r>
-            <a:r>
-              <a:rPr lang="ko-KR" sz="1360" b="0">
-                <a:solidFill>
-                  <a:srgbClr val="A9B9CC"/>
-                </a:solidFill>
-                <a:latin typeface="Noto Sans KR"/>
-                <a:ea typeface="Noto Sans KR"/>
-              </a:rPr>
-              <a:t>기류</a:t>
-            </a:r>
-            <a:r>
-              <a:rPr lang="en-US" sz="1360" b="0">
-                <a:solidFill>
-                  <a:srgbClr val="A9B9CC"/>
-                </a:solidFill>
-                <a:latin typeface="Segoe UI"/>
-                <a:ea typeface="Segoe UI"/>
-              </a:rPr>
-              <a:t> </a:t>
-            </a:r>
-            <a:r>
-              <a:rPr lang="ko-KR" sz="1360" b="0">
-                <a:solidFill>
-                  <a:srgbClr val="A9B9CC"/>
-                </a:solidFill>
-                <a:latin typeface="Noto Sans KR"/>
-                <a:ea typeface="Noto Sans KR"/>
-              </a:rPr>
-              <a:t>무늬</a:t>
-            </a:r>
-            <a:r>
-              <a:rPr lang="en-US" sz="1360" b="0">
-                <a:solidFill>
-                  <a:srgbClr val="A9B9CC"/>
-                </a:solidFill>
-                <a:latin typeface="Segoe UI"/>
-                <a:ea typeface="Segoe UI"/>
-              </a:rPr>
-              <a:t> </a:t>
-            </a:r>
-            <a:r>
-              <a:rPr lang="ko-KR" sz="1360" b="0">
-                <a:solidFill>
-                  <a:srgbClr val="A9B9CC"/>
-                </a:solidFill>
-                <a:latin typeface="Noto Sans KR"/>
-                <a:ea typeface="Noto Sans KR"/>
-              </a:rPr>
-              <a:t>장면</a:t>
-            </a:r>
-          </a:p>
-        </p:txBody>
-      </p:sp>
-      <p:sp>
-        <p:nvSpPr>
-          <p:cNvPr id="11" name="TextBox 10"/>
-          <p:cNvSpPr txBox="1"/>
-          <p:nvPr/>
-        </p:nvSpPr>
-        <p:spPr>
-          <a:xfrm>
-            <a:off x="7473632" y="3592116"/>
-            <a:ext cx="2617751" cy="264089"/>
-          </a:xfrm>
-          <a:prstGeom prst="rect">
-            <a:avLst/>
-          </a:prstGeom>
-          <a:noFill/>
-        </p:spPr>
-        <p:txBody>
-          <a:bodyPr wrap="none" lIns="0" tIns="0" rIns="0" bIns="0">
-            <a:noAutofit/>
-          </a:bodyPr>
-          <a:lstStyle/>
-          <a:p>
-            <a:r>
-              <a:rPr lang="en-US" sz="1386" b="0">
-                <a:solidFill>
-                  <a:srgbClr val="A9B9CC"/>
-                </a:solidFill>
-                <a:latin typeface="Noto Sans KR"/>
-                <a:ea typeface="Noto Sans KR"/>
-              </a:rPr>
-              <a:t>(</a:t>
-            </a:r>
-            <a:r>
-              <a:rPr lang="ko-KR" sz="1386" b="0">
-                <a:solidFill>
-                  <a:srgbClr val="A9B9CC"/>
-                </a:solidFill>
-                <a:latin typeface="Noto Sans KR"/>
-                <a:ea typeface="Noto Sans KR"/>
-              </a:rPr>
-              <a:t>색상</a:t>
-            </a:r>
-            <a:r>
-              <a:rPr lang="en-US" sz="1386" b="0">
-                <a:solidFill>
-                  <a:srgbClr val="A9B9CC"/>
-                </a:solidFill>
-                <a:latin typeface="Segoe UI"/>
-                <a:ea typeface="Segoe UI"/>
-              </a:rPr>
-              <a:t> </a:t>
-            </a:r>
-            <a:r>
-              <a:rPr lang="ko-KR" sz="1386" b="0">
-                <a:solidFill>
-                  <a:srgbClr val="A9B9CC"/>
-                </a:solidFill>
-                <a:latin typeface="Noto Sans KR"/>
-                <a:ea typeface="Noto Sans KR"/>
-              </a:rPr>
-              <a:t>범례</a:t>
-            </a:r>
-            <a:r>
-              <a:rPr lang="en-US" sz="1386" b="0">
-                <a:solidFill>
-                  <a:srgbClr val="A9B9CC"/>
-                </a:solidFill>
-                <a:latin typeface="Segoe UI"/>
-                <a:ea typeface="Segoe UI"/>
-              </a:rPr>
-              <a:t>·</a:t>
-            </a:r>
-            <a:r>
-              <a:rPr lang="ko-KR" sz="1386" b="0">
-                <a:solidFill>
-                  <a:srgbClr val="A9B9CC"/>
-                </a:solidFill>
-                <a:latin typeface="Noto Sans KR"/>
-                <a:ea typeface="Noto Sans KR"/>
-              </a:rPr>
-              <a:t>표시</a:t>
-            </a:r>
-            <a:r>
-              <a:rPr lang="en-US" sz="1386" b="0">
-                <a:solidFill>
-                  <a:srgbClr val="A9B9CC"/>
-                </a:solidFill>
-                <a:latin typeface="Segoe UI"/>
-                <a:ea typeface="Segoe UI"/>
-              </a:rPr>
-              <a:t> </a:t>
-            </a:r>
-            <a:r>
-              <a:rPr lang="ko-KR" sz="1386" b="0">
-                <a:solidFill>
-                  <a:srgbClr val="A9B9CC"/>
-                </a:solidFill>
-                <a:latin typeface="Noto Sans KR"/>
-                <a:ea typeface="Noto Sans KR"/>
-              </a:rPr>
-              <a:t>범위</a:t>
-            </a:r>
-            <a:r>
-              <a:rPr lang="en-US" sz="1386" b="0">
-                <a:solidFill>
-                  <a:srgbClr val="A9B9CC"/>
-                </a:solidFill>
-                <a:latin typeface="Segoe UI"/>
-                <a:ea typeface="Segoe UI"/>
-              </a:rPr>
-              <a:t>·</a:t>
-            </a:r>
-            <a:r>
-              <a:rPr lang="ko-KR" sz="1386" b="0">
-                <a:solidFill>
-                  <a:srgbClr val="A9B9CC"/>
-                </a:solidFill>
-                <a:latin typeface="Noto Sans KR"/>
-                <a:ea typeface="Noto Sans KR"/>
-              </a:rPr>
-              <a:t>촬영일</a:t>
-            </a:r>
-            <a:r>
-              <a:rPr lang="en-US" sz="1386" b="0">
-                <a:solidFill>
-                  <a:srgbClr val="A9B9CC"/>
-                </a:solidFill>
-                <a:latin typeface="Segoe UI"/>
-                <a:ea typeface="Segoe UI"/>
-              </a:rPr>
-              <a:t>·</a:t>
-            </a:r>
-            <a:r>
-              <a:rPr lang="ko-KR" sz="1386" b="0">
-                <a:solidFill>
-                  <a:srgbClr val="A9B9CC"/>
-                </a:solidFill>
-                <a:latin typeface="Noto Sans KR"/>
-                <a:ea typeface="Noto Sans KR"/>
-              </a:rPr>
-              <a:t>구</a:t>
-            </a:r>
-          </a:p>
-        </p:txBody>
-      </p:sp>
-      <p:sp>
-        <p:nvSpPr>
-          <p:cNvPr id="12" name="TextBox 11"/>
-          <p:cNvSpPr txBox="1"/>
-          <p:nvPr/>
-        </p:nvSpPr>
-        <p:spPr>
-          <a:xfrm>
-            <a:off x="8297703" y="3859512"/>
-            <a:ext cx="663693" cy="256494"/>
-          </a:xfrm>
-          <a:prstGeom prst="rect">
-            <a:avLst/>
-          </a:prstGeom>
-          <a:noFill/>
-        </p:spPr>
-        <p:txBody>
-          <a:bodyPr wrap="none" lIns="0" tIns="0" rIns="0" bIns="0">
-            <a:noAutofit/>
-          </a:bodyPr>
-          <a:lstStyle/>
-          <a:p>
-            <a:r>
-              <a:rPr lang="ko-KR" sz="1346" b="0">
-                <a:solidFill>
-                  <a:srgbClr val="A9B9CC"/>
-                </a:solidFill>
-                <a:latin typeface="Noto Sans KR"/>
-                <a:ea typeface="Noto Sans KR"/>
-              </a:rPr>
-              <a:t>성</a:t>
-            </a:r>
-            <a:r>
-              <a:rPr lang="en-US" sz="1346" b="0">
-                <a:solidFill>
-                  <a:srgbClr val="A9B9CC"/>
-                </a:solidFill>
-                <a:latin typeface="Segoe UI"/>
-                <a:ea typeface="Segoe UI"/>
-              </a:rPr>
-              <a:t> </a:t>
-            </a:r>
-            <a:r>
-              <a:rPr lang="ko-KR" sz="1346" b="0">
-                <a:solidFill>
-                  <a:srgbClr val="A9B9CC"/>
-                </a:solidFill>
-                <a:latin typeface="Noto Sans KR"/>
-                <a:ea typeface="Noto Sans KR"/>
-              </a:rPr>
-              <a:t>표기</a:t>
-            </a:r>
-            <a:r>
-              <a:rPr lang="en-US" sz="1346" b="0">
-                <a:solidFill>
-                  <a:srgbClr val="A9B9CC"/>
-                </a:solidFill>
-                <a:latin typeface="Noto Sans KR"/>
-                <a:ea typeface="Noto Sans KR"/>
-              </a:rPr>
-              <a:t>)</a:t>
-            </a:r>
-          </a:p>
-        </p:txBody>
-      </p:sp>
-      <p:sp>
-        <p:nvSpPr>
           <p:cNvPr id="13" name="TextBox 12"/>
           <p:cNvSpPr txBox="1"/>
           <p:nvPr/>
@@ -19972,6 +18455,199 @@
                 <a:ea typeface="Noto Sans KR"/>
               </a:rPr>
               <a:t>복귀</a:t>
+            </a:r>
+          </a:p>
+        </p:txBody>
+      </p:sp>
+      <p:pic>
+        <p:nvPicPr>
+          <p:cNvPr id="16" name="실제 화면" descr="p8.png"/>
+          <p:cNvPicPr>
+            <a:picLocks noChangeAspect="1"/>
+          </p:cNvPicPr>
+          <p:nvPr/>
+        </p:nvPicPr>
+        <p:blipFill>
+          <a:blip r:embed="rId3"/>
+          <a:stretch>
+            <a:fillRect/>
+          </a:stretch>
+        </p:blipFill>
+        <p:spPr>
+          <a:xfrm>
+            <a:off x="5797550" y="1917700"/>
+            <a:ext cx="5575300" cy="3130550"/>
+          </a:xfrm>
+          <a:prstGeom prst="roundRect">
+            <a:avLst>
+              <a:gd name="adj" fmla="val 2600"/>
+            </a:avLst>
+          </a:prstGeom>
+        </p:spPr>
+      </p:pic>
+      <p:sp>
+        <p:nvSpPr>
+          <p:cNvPr id="17" name="캡션"/>
+          <p:cNvSpPr txBox="1"/>
+          <p:nvPr/>
+        </p:nvSpPr>
+        <p:spPr>
+          <a:xfrm>
+            <a:off x="5797550" y="5124450"/>
+            <a:ext cx="5575300" cy="203200"/>
+          </a:xfrm>
+          <a:prstGeom prst="rect">
+            <a:avLst/>
+          </a:prstGeom>
+          <a:noFill/>
+        </p:spPr>
+        <p:txBody>
+          <a:bodyPr wrap="square" lIns="0" rIns="0" tIns="0" bIns="0">
+            <a:spAutoFit/>
+          </a:bodyPr>
+          <a:lstStyle/>
+          <a:p>
+            <a:r>
+              <a:rPr lang="ko-KR" sz="1100" b="0">
+                <a:solidFill>
+                  <a:srgbClr val="A9B9CC"/>
+                </a:solidFill>
+                <a:latin typeface="Noto Sans KR"/>
+                <a:ea typeface="Noto Sans KR"/>
+              </a:rPr>
+              <a:t>32랙 기본 구성, 30초 계산 · 색 범위는 현재 공기 온도에 맞춰 자동 조정 · 2026. 10. 10 촬영</a:t>
+            </a:r>
+          </a:p>
+        </p:txBody>
+      </p:sp>
+      <p:sp>
+        <p:nvSpPr>
+          <p:cNvPr id="18" name="범례"/>
+          <p:cNvSpPr/>
+          <p:nvPr/>
+        </p:nvSpPr>
+        <p:spPr>
+          <a:xfrm>
+            <a:off x="9467850" y="4743450"/>
+            <a:ext cx="1143000" cy="88900"/>
+          </a:xfrm>
+          <a:prstGeom prst="rect">
+            <a:avLst/>
+          </a:prstGeom>
+          <a:gradFill rotWithShape="1">
+            <a:gsLst>
+              <a:gs pos="0">
+                <a:srgbClr val="2F6BFF"/>
+              </a:gs>
+              <a:gs pos="25000">
+                <a:srgbClr val="35C8E8"/>
+              </a:gs>
+              <a:gs pos="50000">
+                <a:srgbClr val="4CD964"/>
+              </a:gs>
+              <a:gs pos="75000">
+                <a:srgbClr val="F5D54A"/>
+              </a:gs>
+              <a:gs pos="100000">
+                <a:srgbClr val="F0453A"/>
+              </a:gs>
+            </a:gsLst>
+            <a:lin scaled="0" ang="0"/>
+          </a:gradFill>
+          <a:ln>
+            <a:noFill/>
+          </a:ln>
+        </p:spPr>
+        <p:style>
+          <a:lnRef idx="1">
+            <a:schemeClr val="accent1"/>
+          </a:lnRef>
+          <a:fillRef idx="3">
+            <a:schemeClr val="accent1"/>
+          </a:fillRef>
+          <a:effectRef idx="2">
+            <a:schemeClr val="accent1"/>
+          </a:effectRef>
+          <a:fontRef idx="minor">
+            <a:schemeClr val="lt1"/>
+          </a:fontRef>
+        </p:style>
+        <p:txBody>
+          <a:bodyPr rtlCol="0" anchor="ctr"/>
+          <a:lstStyle/>
+          <a:p>
+            <a:pPr algn="ctr"/>
+          </a:p>
+        </p:txBody>
+      </p:sp>
+      <p:sp>
+        <p:nvSpPr>
+          <p:cNvPr id="19" name="TextBox 18"/>
+          <p:cNvSpPr txBox="1"/>
+          <p:nvPr/>
+        </p:nvSpPr>
+        <p:spPr>
+          <a:xfrm>
+            <a:off x="9036050" y="4679950"/>
+            <a:ext cx="381000" cy="203200"/>
+          </a:xfrm>
+          <a:prstGeom prst="rect">
+            <a:avLst/>
+          </a:prstGeom>
+          <a:noFill/>
+        </p:spPr>
+        <p:txBody>
+          <a:bodyPr wrap="none" lIns="0" rIns="0" tIns="0" bIns="0">
+            <a:spAutoFit/>
+          </a:bodyPr>
+          <a:lstStyle/>
+          <a:p>
+            <a:pPr algn="r"/>
+            <a:r>
+              <a:rPr sz="1000" b="1">
+                <a:solidFill>
+                  <a:srgbClr val="1A2333"/>
+                </a:solidFill>
+                <a:latin typeface="Noto Sans KR"/>
+                <a:ea typeface="Noto Sans KR"/>
+              </a:rPr>
+              <a:t>낮음</a:t>
+            </a:r>
+          </a:p>
+        </p:txBody>
+      </p:sp>
+      <p:sp>
+        <p:nvSpPr>
+          <p:cNvPr id="20" name="TextBox 19"/>
+          <p:cNvSpPr txBox="1"/>
+          <p:nvPr/>
+        </p:nvSpPr>
+        <p:spPr>
+          <a:xfrm>
+            <a:off x="10661650" y="4679950"/>
+            <a:ext cx="381000" cy="203200"/>
+          </a:xfrm>
+          <a:prstGeom prst="rect">
+            <a:avLst/>
+          </a:prstGeom>
+          <a:noFill/>
+        </p:spPr>
+        <p:txBody>
+          <a:bodyPr wrap="none" lIns="0" rIns="0" tIns="0" bIns="0">
+            <a:spAutoFit/>
+          </a:bodyPr>
+          <a:lstStyle/>
+          <a:p>
+            <a:pPr algn="l"/>
+            <a:r>
+              <a:rPr sz="1000" b="1">
+                <a:solidFill>
+                  <a:srgbClr val="1A2333"/>
+                </a:solidFill>
+                <a:latin typeface="Noto Sans KR"/>
+                <a:ea typeface="Noto Sans KR"/>
+              </a:rPr>
+              <a:t>높음</a:t>
             </a:r>
           </a:p>
         </p:txBody>
@@ -20987,416 +19663,6 @@
       </p:sp>
       <p:sp>
         <p:nvSpPr>
-          <p:cNvPr id="10" name="TextBox 9"/>
-          <p:cNvSpPr txBox="1"/>
-          <p:nvPr/>
-        </p:nvSpPr>
-        <p:spPr>
-          <a:xfrm>
-            <a:off x="7586503" y="2906183"/>
-            <a:ext cx="2177123" cy="330200"/>
-          </a:xfrm>
-          <a:prstGeom prst="rect">
-            <a:avLst/>
-          </a:prstGeom>
-          <a:noFill/>
-        </p:spPr>
-        <p:txBody>
-          <a:bodyPr wrap="none" lIns="0" tIns="0" rIns="0" bIns="0">
-            <a:noAutofit/>
-          </a:bodyPr>
-          <a:lstStyle/>
-          <a:p>
-            <a:r>
-              <a:rPr lang="ko-KR" sz="1733" b="1">
-                <a:solidFill>
-                  <a:srgbClr val="D6E1EC"/>
-                </a:solidFill>
-                <a:latin typeface="Noto Sans KR"/>
-                <a:ea typeface="Noto Sans KR"/>
-              </a:rPr>
-              <a:t>실제</a:t>
-            </a:r>
-            <a:r>
-              <a:rPr lang="en-US" sz="1733" b="1">
-                <a:solidFill>
-                  <a:srgbClr val="D6E1EC"/>
-                </a:solidFill>
-                <a:latin typeface="Segoe UI"/>
-                <a:ea typeface="Segoe UI"/>
-              </a:rPr>
-              <a:t> </a:t>
-            </a:r>
-            <a:r>
-              <a:rPr lang="ko-KR" sz="1733" b="1">
-                <a:solidFill>
-                  <a:srgbClr val="D6E1EC"/>
-                </a:solidFill>
-                <a:latin typeface="Noto Sans KR"/>
-                <a:ea typeface="Noto Sans KR"/>
-              </a:rPr>
-              <a:t>리포트</a:t>
-            </a:r>
-            <a:r>
-              <a:rPr lang="en-US" sz="1733" b="1">
-                <a:solidFill>
-                  <a:srgbClr val="D6E1EC"/>
-                </a:solidFill>
-                <a:latin typeface="Segoe UI"/>
-                <a:ea typeface="Segoe UI"/>
-              </a:rPr>
-              <a:t> </a:t>
-            </a:r>
-            <a:r>
-              <a:rPr lang="ko-KR" sz="1733" b="1">
-                <a:solidFill>
-                  <a:srgbClr val="D6E1EC"/>
-                </a:solidFill>
-                <a:latin typeface="Noto Sans KR"/>
-                <a:ea typeface="Noto Sans KR"/>
-              </a:rPr>
-              <a:t>삽입</a:t>
-            </a:r>
-            <a:r>
-              <a:rPr lang="en-US" sz="1733" b="1">
-                <a:solidFill>
-                  <a:srgbClr val="D6E1EC"/>
-                </a:solidFill>
-                <a:latin typeface="Segoe UI"/>
-                <a:ea typeface="Segoe UI"/>
-              </a:rPr>
-              <a:t> </a:t>
-            </a:r>
-            <a:r>
-              <a:rPr lang="ko-KR" sz="1733" b="1">
-                <a:solidFill>
-                  <a:srgbClr val="D6E1EC"/>
-                </a:solidFill>
-                <a:latin typeface="Noto Sans KR"/>
-                <a:ea typeface="Noto Sans KR"/>
-              </a:rPr>
-              <a:t>예정</a:t>
-            </a:r>
-          </a:p>
-        </p:txBody>
-      </p:sp>
-      <p:sp>
-        <p:nvSpPr>
-          <p:cNvPr id="11" name="TextBox 10"/>
-          <p:cNvSpPr txBox="1"/>
-          <p:nvPr/>
-        </p:nvSpPr>
-        <p:spPr>
-          <a:xfrm>
-            <a:off x="7244080" y="3327894"/>
-            <a:ext cx="3039574" cy="260766"/>
-          </a:xfrm>
-          <a:prstGeom prst="rect">
-            <a:avLst/>
-          </a:prstGeom>
-          <a:noFill/>
-        </p:spPr>
-        <p:txBody>
-          <a:bodyPr wrap="none" lIns="0" tIns="0" rIns="0" bIns="0">
-            <a:noAutofit/>
-          </a:bodyPr>
-          <a:lstStyle/>
-          <a:p>
-            <a:r>
-              <a:rPr lang="ko-KR" sz="1368" b="0">
-                <a:solidFill>
-                  <a:srgbClr val="A9B9CC"/>
-                </a:solidFill>
-                <a:latin typeface="Noto Sans KR"/>
-                <a:ea typeface="Noto Sans KR"/>
-              </a:rPr>
-              <a:t>실제</a:t>
-            </a:r>
-            <a:r>
-              <a:rPr lang="en-US" sz="1368" b="0">
-                <a:solidFill>
-                  <a:srgbClr val="A9B9CC"/>
-                </a:solidFill>
-                <a:latin typeface="Segoe UI"/>
-                <a:ea typeface="Segoe UI"/>
-              </a:rPr>
-              <a:t> </a:t>
-            </a:r>
-            <a:r>
-              <a:rPr lang="ko-KR" sz="1368" b="0">
-                <a:solidFill>
-                  <a:srgbClr val="A9B9CC"/>
-                </a:solidFill>
-                <a:latin typeface="Noto Sans KR"/>
-                <a:ea typeface="Noto Sans KR"/>
-              </a:rPr>
-              <a:t>리포트</a:t>
-            </a:r>
-            <a:r>
-              <a:rPr lang="en-US" sz="1368" b="0">
-                <a:solidFill>
-                  <a:srgbClr val="A9B9CC"/>
-                </a:solidFill>
-                <a:latin typeface="Segoe UI"/>
-                <a:ea typeface="Segoe UI"/>
-              </a:rPr>
-              <a:t> </a:t>
-            </a:r>
-            <a:r>
-              <a:rPr lang="ko-KR" sz="1368" b="0">
-                <a:solidFill>
-                  <a:srgbClr val="A9B9CC"/>
-                </a:solidFill>
-                <a:latin typeface="Noto Sans KR"/>
-                <a:ea typeface="Noto Sans KR"/>
-              </a:rPr>
-              <a:t>발췌</a:t>
-            </a:r>
-            <a:r>
-              <a:rPr lang="en-US" sz="1368" b="0">
-                <a:solidFill>
-                  <a:srgbClr val="A9B9CC"/>
-                </a:solidFill>
-                <a:latin typeface="Noto Sans KR"/>
-                <a:ea typeface="Noto Sans KR"/>
-              </a:rPr>
-              <a:t>(</a:t>
-            </a:r>
-            <a:r>
-              <a:rPr lang="ko-KR" sz="1368" b="0">
-                <a:solidFill>
-                  <a:srgbClr val="A9B9CC"/>
-                </a:solidFill>
-                <a:latin typeface="Noto Sans KR"/>
-                <a:ea typeface="Noto Sans KR"/>
-              </a:rPr>
-              <a:t>흡기</a:t>
-            </a:r>
-            <a:r>
-              <a:rPr lang="en-US" sz="1368" b="0">
-                <a:solidFill>
-                  <a:srgbClr val="A9B9CC"/>
-                </a:solidFill>
-                <a:latin typeface="Segoe UI"/>
-                <a:ea typeface="Segoe UI"/>
-              </a:rPr>
-              <a:t> </a:t>
-            </a:r>
-            <a:r>
-              <a:rPr lang="ko-KR" sz="1368" b="0">
-                <a:solidFill>
-                  <a:srgbClr val="A9B9CC"/>
-                </a:solidFill>
-                <a:latin typeface="Noto Sans KR"/>
-                <a:ea typeface="Noto Sans KR"/>
-              </a:rPr>
-              <a:t>온도</a:t>
-            </a:r>
-            <a:r>
-              <a:rPr lang="en-US" sz="1368" b="0">
-                <a:solidFill>
-                  <a:srgbClr val="A9B9CC"/>
-                </a:solidFill>
-                <a:latin typeface="Segoe UI"/>
-                <a:ea typeface="Segoe UI"/>
-              </a:rPr>
-              <a:t>·</a:t>
-            </a:r>
-            <a:r>
-              <a:rPr lang="ko-KR" sz="1368" b="0">
-                <a:solidFill>
-                  <a:srgbClr val="A9B9CC"/>
-                </a:solidFill>
-                <a:latin typeface="Noto Sans KR"/>
-                <a:ea typeface="Noto Sans KR"/>
-              </a:rPr>
-              <a:t>전력</a:t>
-            </a:r>
-            <a:r>
-              <a:rPr lang="en-US" sz="1368" b="0">
-                <a:solidFill>
-                  <a:srgbClr val="A9B9CC"/>
-                </a:solidFill>
-                <a:latin typeface="Segoe UI"/>
-                <a:ea typeface="Segoe UI"/>
-              </a:rPr>
-              <a:t>·</a:t>
-            </a:r>
-            <a:r>
-              <a:rPr lang="ko-KR" sz="1368" b="0">
-                <a:solidFill>
-                  <a:srgbClr val="A9B9CC"/>
-                </a:solidFill>
-                <a:latin typeface="Noto Sans KR"/>
-                <a:ea typeface="Noto Sans KR"/>
-              </a:rPr>
-              <a:t>센서</a:t>
-            </a:r>
-          </a:p>
-        </p:txBody>
-      </p:sp>
-      <p:sp>
-        <p:nvSpPr>
-          <p:cNvPr id="12" name="TextBox 11"/>
-          <p:cNvSpPr txBox="1"/>
-          <p:nvPr/>
-        </p:nvSpPr>
-        <p:spPr>
-          <a:xfrm>
-            <a:off x="8297703" y="3592037"/>
-            <a:ext cx="748288" cy="264952"/>
-          </a:xfrm>
-          <a:prstGeom prst="rect">
-            <a:avLst/>
-          </a:prstGeom>
-          <a:noFill/>
-        </p:spPr>
-        <p:txBody>
-          <a:bodyPr wrap="none" lIns="0" tIns="0" rIns="0" bIns="0">
-            <a:noAutofit/>
-          </a:bodyPr>
-          <a:lstStyle/>
-          <a:p>
-            <a:r>
-              <a:rPr lang="en-US" sz="1390" b="0">
-                <a:solidFill>
-                  <a:srgbClr val="A9B9CC"/>
-                </a:solidFill>
-                <a:latin typeface="Segoe UI"/>
-                <a:ea typeface="Segoe UI"/>
-              </a:rPr>
-              <a:t>·</a:t>
-            </a:r>
-            <a:r>
-              <a:rPr lang="ko-KR" sz="1390" b="0">
-                <a:solidFill>
-                  <a:srgbClr val="A9B9CC"/>
-                </a:solidFill>
-                <a:latin typeface="Noto Sans KR"/>
-                <a:ea typeface="Noto Sans KR"/>
-              </a:rPr>
-              <a:t>열수지</a:t>
-            </a:r>
-            <a:r>
-              <a:rPr lang="en-US" sz="1390" b="0">
-                <a:solidFill>
-                  <a:srgbClr val="A9B9CC"/>
-                </a:solidFill>
-                <a:latin typeface="Noto Sans KR"/>
-                <a:ea typeface="Noto Sans KR"/>
-              </a:rPr>
-              <a:t>)</a:t>
-            </a:r>
-          </a:p>
-        </p:txBody>
-      </p:sp>
-      <p:sp>
-        <p:nvSpPr>
-          <p:cNvPr id="13" name="TextBox 12"/>
-          <p:cNvSpPr txBox="1"/>
-          <p:nvPr/>
-        </p:nvSpPr>
-        <p:spPr>
-          <a:xfrm>
-            <a:off x="7649527" y="3859163"/>
-            <a:ext cx="2053876" cy="260308"/>
-          </a:xfrm>
-          <a:prstGeom prst="rect">
-            <a:avLst/>
-          </a:prstGeom>
-          <a:noFill/>
-        </p:spPr>
-        <p:txBody>
-          <a:bodyPr wrap="none" lIns="0" tIns="0" rIns="0" bIns="0">
-            <a:noAutofit/>
-          </a:bodyPr>
-          <a:lstStyle/>
-          <a:p>
-            <a:r>
-              <a:rPr lang="en-US" sz="1366" b="0">
-                <a:solidFill>
-                  <a:srgbClr val="A9B9CC"/>
-                </a:solidFill>
-                <a:latin typeface="Noto Sans KR"/>
-                <a:ea typeface="Noto Sans KR"/>
-              </a:rPr>
-              <a:t>+ </a:t>
-            </a:r>
-            <a:r>
-              <a:rPr lang="ko-KR" sz="1366" b="0">
-                <a:solidFill>
-                  <a:srgbClr val="A9B9CC"/>
-                </a:solidFill>
-                <a:latin typeface="Noto Sans KR"/>
-                <a:ea typeface="Noto Sans KR"/>
-              </a:rPr>
-              <a:t>같은</a:t>
-            </a:r>
-            <a:r>
-              <a:rPr lang="en-US" sz="1366" b="0">
-                <a:solidFill>
-                  <a:srgbClr val="A9B9CC"/>
-                </a:solidFill>
-                <a:latin typeface="Segoe UI"/>
-                <a:ea typeface="Segoe UI"/>
-              </a:rPr>
-              <a:t> </a:t>
-            </a:r>
-            <a:r>
-              <a:rPr lang="ko-KR" sz="1366" b="0">
-                <a:solidFill>
-                  <a:srgbClr val="A9B9CC"/>
-                </a:solidFill>
-                <a:latin typeface="Noto Sans KR"/>
-                <a:ea typeface="Noto Sans KR"/>
-              </a:rPr>
-              <a:t>조건</a:t>
-            </a:r>
-            <a:r>
-              <a:rPr lang="en-US" sz="1366" b="0">
-                <a:solidFill>
-                  <a:srgbClr val="A9B9CC"/>
-                </a:solidFill>
-                <a:latin typeface="Noto Sans KR"/>
-                <a:ea typeface="Noto Sans KR"/>
-              </a:rPr>
-              <a:t> A/B </a:t>
-            </a:r>
-            <a:r>
-              <a:rPr lang="ko-KR" sz="1366" b="0">
-                <a:solidFill>
-                  <a:srgbClr val="A9B9CC"/>
-                </a:solidFill>
-                <a:latin typeface="Noto Sans KR"/>
-                <a:ea typeface="Noto Sans KR"/>
-              </a:rPr>
-              <a:t>비교</a:t>
-            </a:r>
-            <a:r>
-              <a:rPr lang="en-US" sz="1366" b="0">
-                <a:solidFill>
-                  <a:srgbClr val="A9B9CC"/>
-                </a:solidFill>
-                <a:latin typeface="Segoe UI"/>
-                <a:ea typeface="Segoe UI"/>
-              </a:rPr>
-              <a:t> </a:t>
-            </a:r>
-            <a:r>
-              <a:rPr lang="ko-KR" sz="1366" b="0">
-                <a:solidFill>
-                  <a:srgbClr val="A9B9CC"/>
-                </a:solidFill>
-                <a:latin typeface="Noto Sans KR"/>
-                <a:ea typeface="Noto Sans KR"/>
-              </a:rPr>
-              <a:t>파일</a:t>
-            </a:r>
-          </a:p>
-        </p:txBody>
-      </p:sp>
-      <p:sp>
-        <p:nvSpPr>
           <p:cNvPr id="14" name="TextBox 13"/>
           <p:cNvSpPr txBox="1"/>
           <p:nvPr/>
@@ -21661,6 +19927,951 @@
                 <a:ea typeface="Noto Sans KR"/>
               </a:rPr>
               <a:t>복원</a:t>
+            </a:r>
+          </a:p>
+        </p:txBody>
+      </p:sp>
+      <p:graphicFrame>
+        <p:nvGraphicFramePr>
+          <p:cNvPr id="17" name="A/B 비교 리포트"/>
+          <p:cNvGraphicFramePr>
+            <a:graphicFrameLocks noGrp="1"/>
+          </p:cNvGraphicFramePr>
+          <p:nvPr/>
+        </p:nvGraphicFramePr>
+        <p:xfrm>
+          <a:off x="5797550" y="1917700"/>
+          <a:ext cx="5575300" cy="3130542"/>
+        </p:xfrm>
+        <a:graphic>
+          <a:graphicData uri="http://schemas.openxmlformats.org/drawingml/2006/table">
+            <a:tbl>
+              <a:tblPr firstRow="0" bandRow="0">
+                <a:tableStyleId>{2D5ABB26-0587-4C30-8999-92F81FD0307C}</a:tableStyleId>
+              </a:tblPr>
+              <a:tblGrid>
+                <a:gridCol w="1895602"/>
+                <a:gridCol w="1226566"/>
+                <a:gridCol w="1338072"/>
+                <a:gridCol w="1115060"/>
+              </a:tblGrid>
+              <a:tr h="347838">
+                <a:tc>
+                  <a:txBody>
+                    <a:bodyPr/>
+                    <a:lstStyle/>
+                    <a:p>
+                      <a:pPr algn="l"/>
+                      <a:r>
+                        <a:rPr sz="1150" b="1">
+                          <a:solidFill>
+                            <a:srgbClr val="3FC1D9"/>
+                          </a:solidFill>
+                          <a:latin typeface="Noto Sans KR"/>
+                          <a:ea typeface="Noto Sans KR"/>
+                        </a:rPr>
+                        <a:t>항목</a:t>
+                      </a:r>
+                    </a:p>
+                  </a:txBody>
+                  <a:tcPr marL="101600" marR="101600" marT="0" marB="0" anchor="ctr">
+                    <a:solidFill>
+                      <a:srgbClr val="1B2D48"/>
+                    </a:solidFill>
+                  </a:tcPr>
+                </a:tc>
+                <a:tc>
+                  <a:txBody>
+                    <a:bodyPr/>
+                    <a:lstStyle/>
+                    <a:p>
+                      <a:pPr algn="r"/>
+                      <a:r>
+                        <a:rPr sz="1150" b="1">
+                          <a:solidFill>
+                            <a:srgbClr val="3FC1D9"/>
+                          </a:solidFill>
+                          <a:latin typeface="Noto Sans KR"/>
+                          <a:ea typeface="Noto Sans KR"/>
+                        </a:rPr>
+                        <a:t>A 차단 없음</a:t>
+                      </a:r>
+                    </a:p>
+                  </a:txBody>
+                  <a:tcPr marL="101600" marR="101600" marT="0" marB="0" anchor="ctr">
+                    <a:solidFill>
+                      <a:srgbClr val="1B2D48"/>
+                    </a:solidFill>
+                  </a:tcPr>
+                </a:tc>
+                <a:tc>
+                  <a:txBody>
+                    <a:bodyPr/>
+                    <a:lstStyle/>
+                    <a:p>
+                      <a:pPr algn="r"/>
+                      <a:r>
+                        <a:rPr sz="1150" b="1">
+                          <a:solidFill>
+                            <a:srgbClr val="3FC1D9"/>
+                          </a:solidFill>
+                          <a:latin typeface="Noto Sans KR"/>
+                          <a:ea typeface="Noto Sans KR"/>
+                        </a:rPr>
+                        <a:t>B 블랭킹+지붕</a:t>
+                      </a:r>
+                    </a:p>
+                  </a:txBody>
+                  <a:tcPr marL="101600" marR="101600" marT="0" marB="0" anchor="ctr">
+                    <a:solidFill>
+                      <a:srgbClr val="1B2D48"/>
+                    </a:solidFill>
+                  </a:tcPr>
+                </a:tc>
+                <a:tc>
+                  <a:txBody>
+                    <a:bodyPr/>
+                    <a:lstStyle/>
+                    <a:p>
+                      <a:pPr algn="r"/>
+                      <a:r>
+                        <a:rPr sz="1150" b="1">
+                          <a:solidFill>
+                            <a:srgbClr val="3FC1D9"/>
+                          </a:solidFill>
+                          <a:latin typeface="Noto Sans KR"/>
+                          <a:ea typeface="Noto Sans KR"/>
+                        </a:rPr>
+                        <a:t>B − A</a:t>
+                      </a:r>
+                    </a:p>
+                  </a:txBody>
+                  <a:tcPr marL="101600" marR="101600" marT="0" marB="0" anchor="ctr">
+                    <a:solidFill>
+                      <a:srgbClr val="1B2D48"/>
+                    </a:solidFill>
+                  </a:tcPr>
+                </a:tc>
+              </a:tr>
+              <a:tr h="347838">
+                <a:tc>
+                  <a:txBody>
+                    <a:bodyPr/>
+                    <a:lstStyle/>
+                    <a:p>
+                      <a:pPr algn="l"/>
+                      <a:r>
+                        <a:rPr sz="1150" b="0">
+                          <a:solidFill>
+                            <a:srgbClr val="EEF2F6"/>
+                          </a:solidFill>
+                          <a:latin typeface="Noto Sans KR"/>
+                          <a:ea typeface="Noto Sans KR"/>
+                        </a:rPr>
+                        <a:t>흡기 온도 최고</a:t>
+                      </a:r>
+                    </a:p>
+                  </a:txBody>
+                  <a:tcPr marL="101600" marR="101600" marT="0" marB="0" anchor="ctr">
+                    <a:solidFill>
+                      <a:srgbClr val="13223A"/>
+                    </a:solidFill>
+                  </a:tcPr>
+                </a:tc>
+                <a:tc>
+                  <a:txBody>
+                    <a:bodyPr/>
+                    <a:lstStyle/>
+                    <a:p>
+                      <a:pPr algn="r"/>
+                      <a:r>
+                        <a:rPr sz="1150" b="0">
+                          <a:solidFill>
+                            <a:srgbClr val="C9D6E3"/>
+                          </a:solidFill>
+                          <a:latin typeface="Noto Sans KR"/>
+                          <a:ea typeface="Noto Sans KR"/>
+                        </a:rPr>
+                        <a:t>31.0 °C</a:t>
+                      </a:r>
+                    </a:p>
+                  </a:txBody>
+                  <a:tcPr marL="101600" marR="101600" marT="0" marB="0" anchor="ctr">
+                    <a:solidFill>
+                      <a:srgbClr val="13223A"/>
+                    </a:solidFill>
+                  </a:tcPr>
+                </a:tc>
+                <a:tc>
+                  <a:txBody>
+                    <a:bodyPr/>
+                    <a:lstStyle/>
+                    <a:p>
+                      <a:pPr algn="r"/>
+                      <a:r>
+                        <a:rPr sz="1150" b="0">
+                          <a:solidFill>
+                            <a:srgbClr val="C9D6E3"/>
+                          </a:solidFill>
+                          <a:latin typeface="Noto Sans KR"/>
+                          <a:ea typeface="Noto Sans KR"/>
+                        </a:rPr>
+                        <a:t>23.9 °C</a:t>
+                      </a:r>
+                    </a:p>
+                  </a:txBody>
+                  <a:tcPr marL="101600" marR="101600" marT="0" marB="0" anchor="ctr">
+                    <a:solidFill>
+                      <a:srgbClr val="13223A"/>
+                    </a:solidFill>
+                  </a:tcPr>
+                </a:tc>
+                <a:tc>
+                  <a:txBody>
+                    <a:bodyPr/>
+                    <a:lstStyle/>
+                    <a:p>
+                      <a:pPr algn="r"/>
+                      <a:r>
+                        <a:rPr sz="1150" b="1">
+                          <a:solidFill>
+                            <a:srgbClr val="F2A65E"/>
+                          </a:solidFill>
+                          <a:latin typeface="Noto Sans KR"/>
+                          <a:ea typeface="Noto Sans KR"/>
+                        </a:rPr>
+                        <a:t>-7.1 °C</a:t>
+                      </a:r>
+                    </a:p>
+                  </a:txBody>
+                  <a:tcPr marL="101600" marR="101600" marT="0" marB="0" anchor="ctr">
+                    <a:solidFill>
+                      <a:srgbClr val="13223A"/>
+                    </a:solidFill>
+                  </a:tcPr>
+                </a:tc>
+              </a:tr>
+              <a:tr h="347838">
+                <a:tc>
+                  <a:txBody>
+                    <a:bodyPr/>
+                    <a:lstStyle/>
+                    <a:p>
+                      <a:pPr algn="l"/>
+                      <a:r>
+                        <a:rPr sz="1150" b="0">
+                          <a:solidFill>
+                            <a:srgbClr val="EEF2F6"/>
+                          </a:solidFill>
+                          <a:latin typeface="Noto Sans KR"/>
+                          <a:ea typeface="Noto Sans KR"/>
+                        </a:rPr>
+                        <a:t>흡기 온도 평균</a:t>
+                      </a:r>
+                    </a:p>
+                  </a:txBody>
+                  <a:tcPr marL="101600" marR="101600" marT="0" marB="0" anchor="ctr">
+                    <a:solidFill>
+                      <a:srgbClr val="0E1A2B"/>
+                    </a:solidFill>
+                  </a:tcPr>
+                </a:tc>
+                <a:tc>
+                  <a:txBody>
+                    <a:bodyPr/>
+                    <a:lstStyle/>
+                    <a:p>
+                      <a:pPr algn="r"/>
+                      <a:r>
+                        <a:rPr sz="1150" b="0">
+                          <a:solidFill>
+                            <a:srgbClr val="C9D6E3"/>
+                          </a:solidFill>
+                          <a:latin typeface="Noto Sans KR"/>
+                          <a:ea typeface="Noto Sans KR"/>
+                        </a:rPr>
+                        <a:t>26.4 °C</a:t>
+                      </a:r>
+                    </a:p>
+                  </a:txBody>
+                  <a:tcPr marL="101600" marR="101600" marT="0" marB="0" anchor="ctr">
+                    <a:solidFill>
+                      <a:srgbClr val="0E1A2B"/>
+                    </a:solidFill>
+                  </a:tcPr>
+                </a:tc>
+                <a:tc>
+                  <a:txBody>
+                    <a:bodyPr/>
+                    <a:lstStyle/>
+                    <a:p>
+                      <a:pPr algn="r"/>
+                      <a:r>
+                        <a:rPr sz="1150" b="0">
+                          <a:solidFill>
+                            <a:srgbClr val="C9D6E3"/>
+                          </a:solidFill>
+                          <a:latin typeface="Noto Sans KR"/>
+                          <a:ea typeface="Noto Sans KR"/>
+                        </a:rPr>
+                        <a:t>23.5 °C</a:t>
+                      </a:r>
+                    </a:p>
+                  </a:txBody>
+                  <a:tcPr marL="101600" marR="101600" marT="0" marB="0" anchor="ctr">
+                    <a:solidFill>
+                      <a:srgbClr val="0E1A2B"/>
+                    </a:solidFill>
+                  </a:tcPr>
+                </a:tc>
+                <a:tc>
+                  <a:txBody>
+                    <a:bodyPr/>
+                    <a:lstStyle/>
+                    <a:p>
+                      <a:pPr algn="r"/>
+                      <a:r>
+                        <a:rPr sz="1150" b="0">
+                          <a:solidFill>
+                            <a:srgbClr val="C9D6E3"/>
+                          </a:solidFill>
+                          <a:latin typeface="Noto Sans KR"/>
+                          <a:ea typeface="Noto Sans KR"/>
+                        </a:rPr>
+                        <a:t>-2.9 °C</a:t>
+                      </a:r>
+                    </a:p>
+                  </a:txBody>
+                  <a:tcPr marL="101600" marR="101600" marT="0" marB="0" anchor="ctr">
+                    <a:solidFill>
+                      <a:srgbClr val="0E1A2B"/>
+                    </a:solidFill>
+                  </a:tcPr>
+                </a:tc>
+              </a:tr>
+              <a:tr h="347838">
+                <a:tc>
+                  <a:txBody>
+                    <a:bodyPr/>
+                    <a:lstStyle/>
+                    <a:p>
+                      <a:pPr algn="l"/>
+                      <a:r>
+                        <a:rPr sz="1150" b="0">
+                          <a:solidFill>
+                            <a:srgbClr val="EEF2F6"/>
+                          </a:solidFill>
+                          <a:latin typeface="Noto Sans KR"/>
+                          <a:ea typeface="Noto Sans KR"/>
+                        </a:rPr>
+                        <a:t>권장 27 °C 초과 흡기</a:t>
+                      </a:r>
+                    </a:p>
+                  </a:txBody>
+                  <a:tcPr marL="101600" marR="101600" marT="0" marB="0" anchor="ctr">
+                    <a:solidFill>
+                      <a:srgbClr val="13223A"/>
+                    </a:solidFill>
+                  </a:tcPr>
+                </a:tc>
+                <a:tc>
+                  <a:txBody>
+                    <a:bodyPr/>
+                    <a:lstStyle/>
+                    <a:p>
+                      <a:pPr algn="r"/>
+                      <a:r>
+                        <a:rPr sz="1150" b="0">
+                          <a:solidFill>
+                            <a:srgbClr val="C9D6E3"/>
+                          </a:solidFill>
+                          <a:latin typeface="Noto Sans KR"/>
+                          <a:ea typeface="Noto Sans KR"/>
+                        </a:rPr>
+                        <a:t>9곳</a:t>
+                      </a:r>
+                    </a:p>
+                  </a:txBody>
+                  <a:tcPr marL="101600" marR="101600" marT="0" marB="0" anchor="ctr">
+                    <a:solidFill>
+                      <a:srgbClr val="13223A"/>
+                    </a:solidFill>
+                  </a:tcPr>
+                </a:tc>
+                <a:tc>
+                  <a:txBody>
+                    <a:bodyPr/>
+                    <a:lstStyle/>
+                    <a:p>
+                      <a:pPr algn="r"/>
+                      <a:r>
+                        <a:rPr sz="1150" b="0">
+                          <a:solidFill>
+                            <a:srgbClr val="C9D6E3"/>
+                          </a:solidFill>
+                          <a:latin typeface="Noto Sans KR"/>
+                          <a:ea typeface="Noto Sans KR"/>
+                        </a:rPr>
+                        <a:t>0곳</a:t>
+                      </a:r>
+                    </a:p>
+                  </a:txBody>
+                  <a:tcPr marL="101600" marR="101600" marT="0" marB="0" anchor="ctr">
+                    <a:solidFill>
+                      <a:srgbClr val="13223A"/>
+                    </a:solidFill>
+                  </a:tcPr>
+                </a:tc>
+                <a:tc>
+                  <a:txBody>
+                    <a:bodyPr/>
+                    <a:lstStyle/>
+                    <a:p>
+                      <a:pPr algn="r"/>
+                      <a:r>
+                        <a:rPr sz="1150" b="1">
+                          <a:solidFill>
+                            <a:srgbClr val="F2A65E"/>
+                          </a:solidFill>
+                          <a:latin typeface="Noto Sans KR"/>
+                          <a:ea typeface="Noto Sans KR"/>
+                        </a:rPr>
+                        <a:t>-9</a:t>
+                      </a:r>
+                    </a:p>
+                  </a:txBody>
+                  <a:tcPr marL="101600" marR="101600" marT="0" marB="0" anchor="ctr">
+                    <a:solidFill>
+                      <a:srgbClr val="13223A"/>
+                    </a:solidFill>
+                  </a:tcPr>
+                </a:tc>
+              </a:tr>
+              <a:tr h="347838">
+                <a:tc>
+                  <a:txBody>
+                    <a:bodyPr/>
+                    <a:lstStyle/>
+                    <a:p>
+                      <a:pPr algn="l"/>
+                      <a:r>
+                        <a:rPr sz="1150" b="0">
+                          <a:solidFill>
+                            <a:srgbClr val="EEF2F6"/>
+                          </a:solidFill>
+                          <a:latin typeface="Noto Sans KR"/>
+                          <a:ea typeface="Noto Sans KR"/>
+                        </a:rPr>
+                        <a:t>가상 센서 경보</a:t>
+                      </a:r>
+                    </a:p>
+                  </a:txBody>
+                  <a:tcPr marL="101600" marR="101600" marT="0" marB="0" anchor="ctr">
+                    <a:solidFill>
+                      <a:srgbClr val="0E1A2B"/>
+                    </a:solidFill>
+                  </a:tcPr>
+                </a:tc>
+                <a:tc>
+                  <a:txBody>
+                    <a:bodyPr/>
+                    <a:lstStyle/>
+                    <a:p>
+                      <a:pPr algn="r"/>
+                      <a:r>
+                        <a:rPr sz="1150" b="0">
+                          <a:solidFill>
+                            <a:srgbClr val="C9D6E3"/>
+                          </a:solidFill>
+                          <a:latin typeface="Noto Sans KR"/>
+                          <a:ea typeface="Noto Sans KR"/>
+                        </a:rPr>
+                        <a:t>12곳</a:t>
+                      </a:r>
+                    </a:p>
+                  </a:txBody>
+                  <a:tcPr marL="101600" marR="101600" marT="0" marB="0" anchor="ctr">
+                    <a:solidFill>
+                      <a:srgbClr val="0E1A2B"/>
+                    </a:solidFill>
+                  </a:tcPr>
+                </a:tc>
+                <a:tc>
+                  <a:txBody>
+                    <a:bodyPr/>
+                    <a:lstStyle/>
+                    <a:p>
+                      <a:pPr algn="r"/>
+                      <a:r>
+                        <a:rPr sz="1150" b="0">
+                          <a:solidFill>
+                            <a:srgbClr val="C9D6E3"/>
+                          </a:solidFill>
+                          <a:latin typeface="Noto Sans KR"/>
+                          <a:ea typeface="Noto Sans KR"/>
+                        </a:rPr>
+                        <a:t>0곳</a:t>
+                      </a:r>
+                    </a:p>
+                  </a:txBody>
+                  <a:tcPr marL="101600" marR="101600" marT="0" marB="0" anchor="ctr">
+                    <a:solidFill>
+                      <a:srgbClr val="0E1A2B"/>
+                    </a:solidFill>
+                  </a:tcPr>
+                </a:tc>
+                <a:tc>
+                  <a:txBody>
+                    <a:bodyPr/>
+                    <a:lstStyle/>
+                    <a:p>
+                      <a:pPr algn="r"/>
+                      <a:r>
+                        <a:rPr sz="1150" b="0">
+                          <a:solidFill>
+                            <a:srgbClr val="F2A65E"/>
+                          </a:solidFill>
+                          <a:latin typeface="Noto Sans KR"/>
+                          <a:ea typeface="Noto Sans KR"/>
+                        </a:rPr>
+                        <a:t>-12</a:t>
+                      </a:r>
+                    </a:p>
+                  </a:txBody>
+                  <a:tcPr marL="101600" marR="101600" marT="0" marB="0" anchor="ctr">
+                    <a:solidFill>
+                      <a:srgbClr val="0E1A2B"/>
+                    </a:solidFill>
+                  </a:tcPr>
+                </a:tc>
+              </a:tr>
+              <a:tr h="347838">
+                <a:tc>
+                  <a:txBody>
+                    <a:bodyPr/>
+                    <a:lstStyle/>
+                    <a:p>
+                      <a:pPr algn="l"/>
+                      <a:r>
+                        <a:rPr sz="1150" b="0">
+                          <a:solidFill>
+                            <a:srgbClr val="EEF2F6"/>
+                          </a:solidFill>
+                          <a:latin typeface="Noto Sans KR"/>
+                          <a:ea typeface="Noto Sans KR"/>
+                        </a:rPr>
+                        <a:t>IT 전력</a:t>
+                      </a:r>
+                    </a:p>
+                  </a:txBody>
+                  <a:tcPr marL="101600" marR="101600" marT="0" marB="0" anchor="ctr">
+                    <a:solidFill>
+                      <a:srgbClr val="13223A"/>
+                    </a:solidFill>
+                  </a:tcPr>
+                </a:tc>
+                <a:tc>
+                  <a:txBody>
+                    <a:bodyPr/>
+                    <a:lstStyle/>
+                    <a:p>
+                      <a:pPr algn="r"/>
+                      <a:r>
+                        <a:rPr sz="1150" b="0">
+                          <a:solidFill>
+                            <a:srgbClr val="C9D6E3"/>
+                          </a:solidFill>
+                          <a:latin typeface="Noto Sans KR"/>
+                          <a:ea typeface="Noto Sans KR"/>
+                        </a:rPr>
+                        <a:t>3,781 kW</a:t>
+                      </a:r>
+                    </a:p>
+                  </a:txBody>
+                  <a:tcPr marL="101600" marR="101600" marT="0" marB="0" anchor="ctr">
+                    <a:solidFill>
+                      <a:srgbClr val="13223A"/>
+                    </a:solidFill>
+                  </a:tcPr>
+                </a:tc>
+                <a:tc>
+                  <a:txBody>
+                    <a:bodyPr/>
+                    <a:lstStyle/>
+                    <a:p>
+                      <a:pPr algn="r"/>
+                      <a:r>
+                        <a:rPr sz="1150" b="0">
+                          <a:solidFill>
+                            <a:srgbClr val="C9D6E3"/>
+                          </a:solidFill>
+                          <a:latin typeface="Noto Sans KR"/>
+                          <a:ea typeface="Noto Sans KR"/>
+                        </a:rPr>
+                        <a:t>3,773 kW</a:t>
+                      </a:r>
+                    </a:p>
+                  </a:txBody>
+                  <a:tcPr marL="101600" marR="101600" marT="0" marB="0" anchor="ctr">
+                    <a:solidFill>
+                      <a:srgbClr val="13223A"/>
+                    </a:solidFill>
+                  </a:tcPr>
+                </a:tc>
+                <a:tc>
+                  <a:txBody>
+                    <a:bodyPr/>
+                    <a:lstStyle/>
+                    <a:p>
+                      <a:pPr algn="r"/>
+                      <a:r>
+                        <a:rPr sz="1150" b="0">
+                          <a:solidFill>
+                            <a:srgbClr val="C9D6E3"/>
+                          </a:solidFill>
+                          <a:latin typeface="Noto Sans KR"/>
+                          <a:ea typeface="Noto Sans KR"/>
+                        </a:rPr>
+                        <a:t>-8.8 kW</a:t>
+                      </a:r>
+                    </a:p>
+                  </a:txBody>
+                  <a:tcPr marL="101600" marR="101600" marT="0" marB="0" anchor="ctr">
+                    <a:solidFill>
+                      <a:srgbClr val="13223A"/>
+                    </a:solidFill>
+                  </a:tcPr>
+                </a:tc>
+              </a:tr>
+              <a:tr h="347838">
+                <a:tc>
+                  <a:txBody>
+                    <a:bodyPr/>
+                    <a:lstStyle/>
+                    <a:p>
+                      <a:pPr algn="l"/>
+                      <a:r>
+                        <a:rPr sz="1150" b="0">
+                          <a:solidFill>
+                            <a:srgbClr val="EEF2F6"/>
+                          </a:solidFill>
+                          <a:latin typeface="Noto Sans KR"/>
+                          <a:ea typeface="Noto Sans KR"/>
+                        </a:rPr>
+                        <a:t>CRAH 팬 + 펌프</a:t>
+                      </a:r>
+                    </a:p>
+                  </a:txBody>
+                  <a:tcPr marL="101600" marR="101600" marT="0" marB="0" anchor="ctr">
+                    <a:solidFill>
+                      <a:srgbClr val="0E1A2B"/>
+                    </a:solidFill>
+                  </a:tcPr>
+                </a:tc>
+                <a:tc>
+                  <a:txBody>
+                    <a:bodyPr/>
+                    <a:lstStyle/>
+                    <a:p>
+                      <a:pPr algn="r"/>
+                      <a:r>
+                        <a:rPr sz="1150" b="0">
+                          <a:solidFill>
+                            <a:srgbClr val="C9D6E3"/>
+                          </a:solidFill>
+                          <a:latin typeface="Noto Sans KR"/>
+                          <a:ea typeface="Noto Sans KR"/>
+                        </a:rPr>
+                        <a:t>37.3 kW</a:t>
+                      </a:r>
+                    </a:p>
+                  </a:txBody>
+                  <a:tcPr marL="101600" marR="101600" marT="0" marB="0" anchor="ctr">
+                    <a:solidFill>
+                      <a:srgbClr val="0E1A2B"/>
+                    </a:solidFill>
+                  </a:tcPr>
+                </a:tc>
+                <a:tc>
+                  <a:txBody>
+                    <a:bodyPr/>
+                    <a:lstStyle/>
+                    <a:p>
+                      <a:pPr algn="r"/>
+                      <a:r>
+                        <a:rPr sz="1150" b="0">
+                          <a:solidFill>
+                            <a:srgbClr val="C9D6E3"/>
+                          </a:solidFill>
+                          <a:latin typeface="Noto Sans KR"/>
+                          <a:ea typeface="Noto Sans KR"/>
+                        </a:rPr>
+                        <a:t>37.3 kW</a:t>
+                      </a:r>
+                    </a:p>
+                  </a:txBody>
+                  <a:tcPr marL="101600" marR="101600" marT="0" marB="0" anchor="ctr">
+                    <a:solidFill>
+                      <a:srgbClr val="0E1A2B"/>
+                    </a:solidFill>
+                  </a:tcPr>
+                </a:tc>
+                <a:tc>
+                  <a:txBody>
+                    <a:bodyPr/>
+                    <a:lstStyle/>
+                    <a:p>
+                      <a:pPr algn="r"/>
+                      <a:r>
+                        <a:rPr sz="1150" b="0">
+                          <a:solidFill>
+                            <a:srgbClr val="C9D6E3"/>
+                          </a:solidFill>
+                          <a:latin typeface="Noto Sans KR"/>
+                          <a:ea typeface="Noto Sans KR"/>
+                        </a:rPr>
+                        <a:t>0.0 kW</a:t>
+                      </a:r>
+                    </a:p>
+                  </a:txBody>
+                  <a:tcPr marL="101600" marR="101600" marT="0" marB="0" anchor="ctr">
+                    <a:solidFill>
+                      <a:srgbClr val="0E1A2B"/>
+                    </a:solidFill>
+                  </a:tcPr>
+                </a:tc>
+              </a:tr>
+              <a:tr h="347838">
+                <a:tc>
+                  <a:txBody>
+                    <a:bodyPr/>
+                    <a:lstStyle/>
+                    <a:p>
+                      <a:pPr algn="l"/>
+                      <a:r>
+                        <a:rPr sz="1150" b="0">
+                          <a:solidFill>
+                            <a:srgbClr val="EEF2F6"/>
+                          </a:solidFill>
+                          <a:latin typeface="Noto Sans KR"/>
+                          <a:ea typeface="Noto Sans KR"/>
+                        </a:rPr>
+                        <a:t>부분 PUE</a:t>
+                      </a:r>
+                    </a:p>
+                  </a:txBody>
+                  <a:tcPr marL="101600" marR="101600" marT="0" marB="0" anchor="ctr">
+                    <a:solidFill>
+                      <a:srgbClr val="13223A"/>
+                    </a:solidFill>
+                  </a:tcPr>
+                </a:tc>
+                <a:tc>
+                  <a:txBody>
+                    <a:bodyPr/>
+                    <a:lstStyle/>
+                    <a:p>
+                      <a:pPr algn="r"/>
+                      <a:r>
+                        <a:rPr sz="1150" b="0">
+                          <a:solidFill>
+                            <a:srgbClr val="C9D6E3"/>
+                          </a:solidFill>
+                          <a:latin typeface="Noto Sans KR"/>
+                          <a:ea typeface="Noto Sans KR"/>
+                        </a:rPr>
+                        <a:t>1.010</a:t>
+                      </a:r>
+                    </a:p>
+                  </a:txBody>
+                  <a:tcPr marL="101600" marR="101600" marT="0" marB="0" anchor="ctr">
+                    <a:solidFill>
+                      <a:srgbClr val="13223A"/>
+                    </a:solidFill>
+                  </a:tcPr>
+                </a:tc>
+                <a:tc>
+                  <a:txBody>
+                    <a:bodyPr/>
+                    <a:lstStyle/>
+                    <a:p>
+                      <a:pPr algn="r"/>
+                      <a:r>
+                        <a:rPr sz="1150" b="0">
+                          <a:solidFill>
+                            <a:srgbClr val="C9D6E3"/>
+                          </a:solidFill>
+                          <a:latin typeface="Noto Sans KR"/>
+                          <a:ea typeface="Noto Sans KR"/>
+                        </a:rPr>
+                        <a:t>1.010</a:t>
+                      </a:r>
+                    </a:p>
+                  </a:txBody>
+                  <a:tcPr marL="101600" marR="101600" marT="0" marB="0" anchor="ctr">
+                    <a:solidFill>
+                      <a:srgbClr val="13223A"/>
+                    </a:solidFill>
+                  </a:tcPr>
+                </a:tc>
+                <a:tc>
+                  <a:txBody>
+                    <a:bodyPr/>
+                    <a:lstStyle/>
+                    <a:p>
+                      <a:pPr algn="r"/>
+                      <a:r>
+                        <a:rPr sz="1150" b="0">
+                          <a:solidFill>
+                            <a:srgbClr val="C9D6E3"/>
+                          </a:solidFill>
+                          <a:latin typeface="Noto Sans KR"/>
+                          <a:ea typeface="Noto Sans KR"/>
+                        </a:rPr>
+                        <a:t>0.000</a:t>
+                      </a:r>
+                    </a:p>
+                  </a:txBody>
+                  <a:tcPr marL="101600" marR="101600" marT="0" marB="0" anchor="ctr">
+                    <a:solidFill>
+                      <a:srgbClr val="13223A"/>
+                    </a:solidFill>
+                  </a:tcPr>
+                </a:tc>
+              </a:tr>
+              <a:tr h="347838">
+                <a:tc>
+                  <a:txBody>
+                    <a:bodyPr/>
+                    <a:lstStyle/>
+                    <a:p>
+                      <a:pPr algn="l"/>
+                      <a:r>
+                        <a:rPr sz="1150" b="0">
+                          <a:solidFill>
+                            <a:srgbClr val="EEF2F6"/>
+                          </a:solidFill>
+                          <a:latin typeface="Noto Sans KR"/>
+                          <a:ea typeface="Noto Sans KR"/>
+                        </a:rPr>
+                        <a:t>열 장부 오차</a:t>
+                      </a:r>
+                    </a:p>
+                  </a:txBody>
+                  <a:tcPr marL="101600" marR="101600" marT="0" marB="0" anchor="ctr">
+                    <a:solidFill>
+                      <a:srgbClr val="0E1A2B"/>
+                    </a:solidFill>
+                  </a:tcPr>
+                </a:tc>
+                <a:tc>
+                  <a:txBody>
+                    <a:bodyPr/>
+                    <a:lstStyle/>
+                    <a:p>
+                      <a:pPr algn="r"/>
+                      <a:r>
+                        <a:rPr sz="1150" b="0">
+                          <a:solidFill>
+                            <a:srgbClr val="C9D6E3"/>
+                          </a:solidFill>
+                          <a:latin typeface="Noto Sans KR"/>
+                          <a:ea typeface="Noto Sans KR"/>
+                        </a:rPr>
+                        <a:t>4.5e-14</a:t>
+                      </a:r>
+                    </a:p>
+                  </a:txBody>
+                  <a:tcPr marL="101600" marR="101600" marT="0" marB="0" anchor="ctr">
+                    <a:solidFill>
+                      <a:srgbClr val="0E1A2B"/>
+                    </a:solidFill>
+                  </a:tcPr>
+                </a:tc>
+                <a:tc>
+                  <a:txBody>
+                    <a:bodyPr/>
+                    <a:lstStyle/>
+                    <a:p>
+                      <a:pPr algn="r"/>
+                      <a:r>
+                        <a:rPr sz="1150" b="0">
+                          <a:solidFill>
+                            <a:srgbClr val="C9D6E3"/>
+                          </a:solidFill>
+                          <a:latin typeface="Noto Sans KR"/>
+                          <a:ea typeface="Noto Sans KR"/>
+                        </a:rPr>
+                        <a:t>4.9e-14</a:t>
+                      </a:r>
+                    </a:p>
+                  </a:txBody>
+                  <a:tcPr marL="101600" marR="101600" marT="0" marB="0" anchor="ctr">
+                    <a:solidFill>
+                      <a:srgbClr val="0E1A2B"/>
+                    </a:solidFill>
+                  </a:tcPr>
+                </a:tc>
+                <a:tc>
+                  <a:txBody>
+                    <a:bodyPr/>
+                    <a:lstStyle/>
+                    <a:p>
+                      <a:pPr algn="r"/>
+                      <a:r>
+                        <a:rPr sz="1150" b="0">
+                          <a:solidFill>
+                            <a:srgbClr val="C9D6E3"/>
+                          </a:solidFill>
+                          <a:latin typeface="Noto Sans KR"/>
+                          <a:ea typeface="Noto Sans KR"/>
+                        </a:rPr>
+                        <a:t>둘 다 ≈ 0</a:t>
+                      </a:r>
+                    </a:p>
+                  </a:txBody>
+                  <a:tcPr marL="101600" marR="101600" marT="0" marB="0" anchor="ctr">
+                    <a:solidFill>
+                      <a:srgbClr val="0E1A2B"/>
+                    </a:solidFill>
+                  </a:tcPr>
+                </a:tc>
+              </a:tr>
+            </a:tbl>
+          </a:graphicData>
+        </a:graphic>
+      </p:graphicFrame>
+      <p:sp>
+        <p:nvSpPr>
+          <p:cNvPr id="18" name="캡션"/>
+          <p:cNvSpPr txBox="1"/>
+          <p:nvPr/>
+        </p:nvSpPr>
+        <p:spPr>
+          <a:xfrm>
+            <a:off x="5797550" y="5124450"/>
+            <a:ext cx="5575300" cy="203200"/>
+          </a:xfrm>
+          <a:prstGeom prst="rect">
+            <a:avLst/>
+          </a:prstGeom>
+          <a:noFill/>
+        </p:spPr>
+        <p:txBody>
+          <a:bodyPr wrap="square" lIns="0" rIns="0" tIns="0" bIns="0">
+            <a:spAutoFit/>
+          </a:bodyPr>
+          <a:lstStyle/>
+          <a:p>
+            <a:r>
+              <a:rPr lang="ko-KR" sz="1100" b="0">
+                <a:solidFill>
+                  <a:srgbClr val="A9B9CC"/>
+                </a:solidFill>
+                <a:latin typeface="Noto Sans KR"/>
+                <a:ea typeface="Noto Sans KR"/>
+              </a:rPr>
+              <a:t>실제 리포트 발췌 · 32랙, 조건별 300초 계산의 마지막 100초 평균 · Saved/Reports/AB_ppt_a_vs_ppt_b.md · 2026. 10. 10</a:t>
             </a:r>
           </a:p>
         </p:txBody>
